--- a/Final_Revision/Exam_Practice/FR-L03_Speaking_Workshop_Places_Environment_and_the_Digital_World.pptx
+++ b/Final_Revision/Exam_Practice/FR-L03_Speaking_Workshop_Places_Environment_and_the_Digital_World.pptx
@@ -615,7 +615,11 @@
           <a:lstStyle/>
           <a:p>
             <a:r>
-              <a:rPr lang="en-US" dirty="0"/>
+              <a:rPr lang="ar-SA" dirty="0">
+                <a:latin typeface="Amiri" pitchFamily="2" charset="-78"/>
+                <a:ea typeface="Amiri" pitchFamily="2" charset="-78"/>
+                <a:cs typeface="Amiri" pitchFamily="2" charset="-78"/>
+              </a:rPr>
               <a:t>ROLE PLAY C (Develop) — the school eco-club.
 SET-UP IN THE BREAKOUT ROOM: A = examiner (reads the left column ONLY — the questions, in order), B = candidate (sees the task column; Core may use the help column), C = observer (ticks the feedback checklist). 1 minute preparation, about 3 minutes speaking, 1 minute feedback, then rotate.
 Task ! is the unexpected question: in the exam the candidate has not seen it — the examiner should read it without warning.
@@ -707,7 +711,11 @@
           <a:lstStyle/>
           <a:p>
             <a:r>
-              <a:rPr lang="en-US" dirty="0"/>
+              <a:rPr lang="ar-SA" dirty="0">
+                <a:latin typeface="Amiri" pitchFamily="2" charset="-78"/>
+                <a:ea typeface="Amiri" pitchFamily="2" charset="-78"/>
+                <a:cs typeface="Amiri" pitchFamily="2" charset="-78"/>
+              </a:rPr>
               <a:t>ROLE PLAY D (Stretch) — a youth debate.
 SET-UP IN THE BREAKOUT ROOM: A = examiner (reads the left column ONLY — the questions, in order), B = candidate (sees the task column; Core may use the help column), C = observer (ticks the feedback checklist). 1 minute preparation, about 3 minutes speaking, 1 minute feedback, then rotate.
 Task ! is the unexpected question: in the exam the candidate has not seen it — the examiner should read it without warning.
@@ -1243,7 +1251,11 @@
           <a:lstStyle/>
           <a:p>
             <a:r>
-              <a:rPr lang="en-US" dirty="0"/>
+              <a:rPr lang="ar-SA" dirty="0">
+                <a:latin typeface="Amiri" pitchFamily="2" charset="-78"/>
+                <a:ea typeface="Amiri" pitchFamily="2" charset="-78"/>
+                <a:cs typeface="Amiri" pitchFamily="2" charset="-78"/>
+              </a:rPr>
               <a:t>TOPIC CONVERSATION — Core. Examiner asks the questions in order and may add “لِمَاذَا؟ / هَلْ يُمْكِنُ أَنْ تَشْرَحَ أَكْثَرَ؟” to push for more. Candidate aims for one full sentence per question.
 </a:t>
             </a:r>
@@ -1332,7 +1344,11 @@
           <a:lstStyle/>
           <a:p>
             <a:r>
-              <a:rPr lang="en-US" dirty="0"/>
+              <a:rPr lang="ar-SA" dirty="0">
+                <a:latin typeface="Amiri" pitchFamily="2" charset="-78"/>
+                <a:ea typeface="Amiri" pitchFamily="2" charset="-78"/>
+                <a:cs typeface="Amiri" pitchFamily="2" charset="-78"/>
+              </a:rPr>
               <a:t>TOPIC CONVERSATION — Develop. Examiner asks the questions in order and may add “لِمَاذَا؟ / هَلْ يُمْكِنُ أَنْ تَشْرَحَ أَكْثَرَ؟” to push for more. Candidate aims for two or three sentences, with cause, effect and a time frame.
 </a:t>
             </a:r>
@@ -1421,7 +1437,11 @@
           <a:lstStyle/>
           <a:p>
             <a:r>
-              <a:rPr lang="en-US" dirty="0"/>
+              <a:rPr lang="ar-SA" dirty="0">
+                <a:latin typeface="Amiri" pitchFamily="2" charset="-78"/>
+                <a:ea typeface="Amiri" pitchFamily="2" charset="-78"/>
+                <a:cs typeface="Amiri" pitchFamily="2" charset="-78"/>
+              </a:rPr>
               <a:t>TOPIC CONVERSATION — Stretch. Examiner asks the questions in order and may add “لِمَاذَا؟ / هَلْ يُمْكِنُ أَنْ تَشْرَحَ أَكْثَرَ؟” to push for more. Candidate aims for a developed answer: opinion, balance, concession and a conditional.
 </a:t>
             </a:r>
@@ -1510,7 +1530,11 @@
           <a:lstStyle/>
           <a:p>
             <a:r>
-              <a:rPr lang="en-US" dirty="0"/>
+              <a:rPr lang="ar-SA" dirty="0">
+                <a:latin typeface="Amiri" pitchFamily="2" charset="-78"/>
+                <a:ea typeface="Amiri" pitchFamily="2" charset="-78"/>
+                <a:cs typeface="Amiri" pitchFamily="2" charset="-78"/>
+              </a:rPr>
               <a:t>WELCOME (1 min) — while students join.
 • Greet each student by name as they arrive: السَّلَامُ عَلَيْكُمْ. Take the register (Pastoral Tracker: attendance 0/1).
 • 2-MINUTE CHECK-IN (SEND training): a private chat to any student who seemed unsettled last lesson — “Are you okay today? 👍 / 👎”.
@@ -2224,7 +2248,11 @@
           <a:lstStyle/>
           <a:p>
             <a:r>
-              <a:rPr lang="en-US" dirty="0"/>
+              <a:rPr lang="ar-SA" dirty="0">
+                <a:latin typeface="Amiri" pitchFamily="2" charset="-78"/>
+                <a:ea typeface="Amiri" pitchFamily="2" charset="-78"/>
+                <a:cs typeface="Amiri" pitchFamily="2" charset="-78"/>
+              </a:rPr>
               <a:t>TEACH (3 min). Role play = precise and complete; conversation = develop. Choral repetition of the repair phrases. To a girl: تُعِيدِي.</a:t>
             </a:r>
             <a:endParaRPr lang="en-US" dirty="0"/>
@@ -2312,7 +2340,11 @@
           <a:lstStyle/>
           <a:p>
             <a:r>
-              <a:rPr lang="en-US" dirty="0"/>
+              <a:rPr lang="ar-SA" dirty="0">
+                <a:latin typeface="Amiri" pitchFamily="2" charset="-78"/>
+                <a:ea typeface="Amiri" pitchFamily="2" charset="-78"/>
+                <a:cs typeface="Amiri" pitchFamily="2" charset="-78"/>
+              </a:rPr>
               <a:t>LANGUAGE BANK (2 min) — a revision map of Topic C. EXAM TIP: for a place, give WHERE (يَقَعُ فِي شَمَالِ …), WHAT is there (يُوجَدُ / تُوجَدُ) and WHAT IT IS LIKE (agreement: غَابَاتٌ كَثِيفَةٌ).</a:t>
             </a:r>
             <a:endParaRPr lang="en-US" dirty="0"/>
@@ -2400,7 +2432,11 @@
           <a:lstStyle/>
           <a:p>
             <a:r>
-              <a:rPr lang="en-US" dirty="0"/>
+              <a:rPr lang="ar-SA" dirty="0">
+                <a:latin typeface="Amiri" pitchFamily="2" charset="-78"/>
+                <a:ea typeface="Amiri" pitchFamily="2" charset="-78"/>
+                <a:cs typeface="Amiri" pitchFamily="2" charset="-78"/>
+              </a:rPr>
               <a:t>LANGUAGE BANK (2 min) — the environment answer in three steps: بِسَبَبِ … ، مِمَّا يُؤَدِّي إِلَى … ؛ لِذٰلِكَ يَجِبُ عَلَيْنَا أَنْ … EXAM TIP: numbers and prices are easy marks — say them slowly and check the noun after the number.</a:t>
             </a:r>
             <a:endParaRPr lang="en-US" dirty="0"/>
@@ -2576,7 +2612,11 @@
           <a:lstStyle/>
           <a:p>
             <a:r>
-              <a:rPr lang="en-US" dirty="0"/>
+              <a:rPr lang="ar-SA" dirty="0">
+                <a:latin typeface="Amiri" pitchFamily="2" charset="-78"/>
+                <a:ea typeface="Amiri" pitchFamily="2" charset="-78"/>
+                <a:cs typeface="Amiri" pitchFamily="2" charset="-78"/>
+              </a:rPr>
               <a:t>ROLE PLAY A (Core) — a tourist office.
 SET-UP IN THE BREAKOUT ROOM: A = examiner (reads the left column ONLY — the questions, in order), B = candidate (sees the task column; Core may use the help column), C = observer (ticks the feedback checklist). 1 minute preparation, about 3 minutes speaking, 1 minute feedback, then rotate.
 Task ! is the unexpected question: in the exam the candidate has not seen it — the examiner should read it without warning.
@@ -2668,7 +2708,11 @@
           <a:lstStyle/>
           <a:p>
             <a:r>
-              <a:rPr lang="en-US" dirty="0"/>
+              <a:rPr lang="ar-SA" dirty="0">
+                <a:latin typeface="Amiri" pitchFamily="2" charset="-78"/>
+                <a:ea typeface="Amiri" pitchFamily="2" charset="-78"/>
+                <a:cs typeface="Amiri" pitchFamily="2" charset="-78"/>
+              </a:rPr>
               <a:t>ROLE PLAY B (Core+) — a phone booking.
 SET-UP IN THE BREAKOUT ROOM: A = examiner (reads the left column ONLY — the questions, in order), B = candidate (sees the task column; Core may use the help column), C = observer (ticks the feedback checklist). 1 minute preparation, about 3 minutes speaking, 1 minute feedback, then rotate.
 Task ! is the unexpected question: in the exam the candidate has not seen it — the examiner should read it without warning.
@@ -3156,6 +3200,7 @@
                   <a:srgbClr val="D4AF37"/>
                 </a:solidFill>
                 <a:latin typeface="Amiri" pitchFamily="2" charset="-78"/>
+                <a:ea typeface="Amiri" pitchFamily="2" charset="-78"/>
                 <a:cs typeface="Amiri" pitchFamily="2" charset="-78"/>
               </a:rPr>
               <a:t>م</a:t>
@@ -3362,6 +3407,7 @@
                   <a:srgbClr val="D4AF37"/>
                 </a:solidFill>
                 <a:latin typeface="Amiri" pitchFamily="2" charset="-78"/>
+                <a:ea typeface="Amiri" pitchFamily="2" charset="-78"/>
                 <a:cs typeface="Amiri" pitchFamily="2" charset="-78"/>
               </a:rPr>
               <a:t>وَرْشَةُ التَّحَدُّثِ — الأَمَاكِنُ وَالبِيئَةُ وَالعَالَمُ الرَّقْمِيُّ</a:t>
@@ -3413,6 +3459,7 @@
                   <a:srgbClr val="C6D2E6"/>
                 </a:solidFill>
                 <a:latin typeface="Amiri" pitchFamily="2" charset="-78"/>
+                <a:ea typeface="Amiri" pitchFamily="2" charset="-78"/>
                 <a:cs typeface="Amiri" pitchFamily="2" charset="-78"/>
               </a:rPr>
               <a:t>يُوجَدُ / تُوجَدُ</a:t>
@@ -3845,6 +3892,7 @@
                   <a:srgbClr val="D4AF37"/>
                 </a:solidFill>
                 <a:latin typeface="Amiri" pitchFamily="2" charset="-78"/>
+                <a:ea typeface="Amiri" pitchFamily="2" charset="-78"/>
                 <a:cs typeface="Amiri" pitchFamily="2" charset="-78"/>
               </a:rPr>
               <a:t>م</a:t>
@@ -4165,6 +4213,7 @@
                   <a:srgbClr val="8A6D1E"/>
                 </a:solidFill>
                 <a:latin typeface="Amiri" pitchFamily="2" charset="-78"/>
+                <a:ea typeface="Amiri" pitchFamily="2" charset="-78"/>
                 <a:cs typeface="Amiri" pitchFamily="2" charset="-78"/>
               </a:rPr>
               <a:t>مُشْكِلَةٌ بِيئِيَّةٌ فِي مَدِينَتِي</a:t>
@@ -4445,6 +4494,7 @@
                   <a:srgbClr val="1B3B6F"/>
                 </a:solidFill>
                 <a:latin typeface="Amiri" pitchFamily="2" charset="-78"/>
+                <a:ea typeface="Amiri" pitchFamily="2" charset="-78"/>
                 <a:cs typeface="Amiri" pitchFamily="2" charset="-78"/>
               </a:rPr>
               <a:t>أَكْبَرُ مُشْكِلَةٍ … بِسَبَبِ …</a:t>
@@ -4521,6 +4571,7 @@
                   <a:srgbClr val="1B3B6F"/>
                 </a:solidFill>
                 <a:latin typeface="Amiri" pitchFamily="2" charset="-78"/>
+                <a:ea typeface="Amiri" pitchFamily="2" charset="-78"/>
                 <a:cs typeface="Amiri" pitchFamily="2" charset="-78"/>
               </a:rPr>
               <a:t>مَا أَكْبَرُ مُشْكِلَةٍ بِيئِيَّةٍ فِي مَدِينَتِكَ؟</a:t>
@@ -4624,6 +4675,7 @@
                   <a:srgbClr val="1B3B6F"/>
                 </a:solidFill>
                 <a:latin typeface="Amiri" pitchFamily="2" charset="-78"/>
+                <a:ea typeface="Amiri" pitchFamily="2" charset="-78"/>
                 <a:cs typeface="Amiri" pitchFamily="2" charset="-78"/>
               </a:rPr>
               <a:t>… مِمَّا يُؤَدِّي إِلَى …</a:t>
@@ -4700,6 +4752,7 @@
                   <a:srgbClr val="1B3B6F"/>
                 </a:solidFill>
                 <a:latin typeface="Amiri" pitchFamily="2" charset="-78"/>
+                <a:ea typeface="Amiri" pitchFamily="2" charset="-78"/>
                 <a:cs typeface="Amiri" pitchFamily="2" charset="-78"/>
               </a:rPr>
               <a:t>وَمَا نَتَائِجُهَا؟</a:t>
@@ -4803,6 +4856,7 @@
                   <a:srgbClr val="1B3B6F"/>
                 </a:solidFill>
                 <a:latin typeface="Amiri" pitchFamily="2" charset="-78"/>
+                <a:ea typeface="Amiri" pitchFamily="2" charset="-78"/>
                 <a:cs typeface="Amiri" pitchFamily="2" charset="-78"/>
               </a:rPr>
               <a:t>نَظَّمْنَا … ؛ وَزُرِعَتْ …</a:t>
@@ -4879,6 +4933,7 @@
                   <a:srgbClr val="1B3B6F"/>
                 </a:solidFill>
                 <a:latin typeface="Amiri" pitchFamily="2" charset="-78"/>
+                <a:ea typeface="Amiri" pitchFamily="2" charset="-78"/>
                 <a:cs typeface="Amiri" pitchFamily="2" charset="-78"/>
               </a:rPr>
               <a:t>مَاذَا فَعَلَ نَادِيكُمْ؟</a:t>
@@ -4982,6 +5037,7 @@
                   <a:srgbClr val="1B3B6F"/>
                 </a:solidFill>
                 <a:latin typeface="Amiri" pitchFamily="2" charset="-78"/>
+                <a:ea typeface="Amiri" pitchFamily="2" charset="-78"/>
                 <a:cs typeface="Amiri" pitchFamily="2" charset="-78"/>
               </a:rPr>
               <a:t>يَجِبُ عَلَى البَلَدِيَّةِ أَنْ … وَأَنْ …</a:t>
@@ -5058,6 +5114,7 @@
                   <a:srgbClr val="1B3B6F"/>
                 </a:solidFill>
                 <a:latin typeface="Amiri" pitchFamily="2" charset="-78"/>
+                <a:ea typeface="Amiri" pitchFamily="2" charset="-78"/>
                 <a:cs typeface="Amiri" pitchFamily="2" charset="-78"/>
               </a:rPr>
               <a:t>وَمَاذَا يَجِبُ أَنْ تَفْعَلَ البَلَدِيَّةُ؟</a:t>
@@ -5161,6 +5218,7 @@
                   <a:srgbClr val="1B3B6F"/>
                 </a:solidFill>
                 <a:latin typeface="Amiri" pitchFamily="2" charset="-78"/>
+                <a:ea typeface="Amiri" pitchFamily="2" charset="-78"/>
                 <a:cs typeface="Amiri" pitchFamily="2" charset="-78"/>
               </a:rPr>
               <a:t>كَانَتْ … أَمَّا الآنَ فَهِيَ …</a:t>
@@ -5237,6 +5295,7 @@
                   <a:srgbClr val="1B3B6F"/>
                 </a:solidFill>
                 <a:latin typeface="Amiri" pitchFamily="2" charset="-78"/>
+                <a:ea typeface="Amiri" pitchFamily="2" charset="-78"/>
                 <a:cs typeface="Amiri" pitchFamily="2" charset="-78"/>
               </a:rPr>
               <a:t>وَهَلْ تَغَيَّرَتِ المَدِينَةُ مُنْذُ طُفُولَتِكَ؟</a:t>
@@ -5446,6 +5505,7 @@
                   <a:srgbClr val="D4AF37"/>
                 </a:solidFill>
                 <a:latin typeface="Amiri" pitchFamily="2" charset="-78"/>
+                <a:ea typeface="Amiri" pitchFamily="2" charset="-78"/>
                 <a:cs typeface="Amiri" pitchFamily="2" charset="-78"/>
               </a:rPr>
               <a:t>م</a:t>
@@ -5766,6 +5826,7 @@
                   <a:srgbClr val="8A6D1E"/>
                 </a:solidFill>
                 <a:latin typeface="Amiri" pitchFamily="2" charset="-78"/>
+                <a:ea typeface="Amiri" pitchFamily="2" charset="-78"/>
                 <a:cs typeface="Amiri" pitchFamily="2" charset="-78"/>
               </a:rPr>
               <a:t>هَلْ تُنْقِذُ التِّكْنُولُوجْيَا الكَوْكَبَ؟</a:t>
@@ -6046,6 +6107,7 @@
                   <a:srgbClr val="1B3B6F"/>
                 </a:solidFill>
                 <a:latin typeface="Amiri" pitchFamily="2" charset="-78"/>
+                <a:ea typeface="Amiri" pitchFamily="2" charset="-78"/>
                 <a:cs typeface="Amiri" pitchFamily="2" charset="-78"/>
               </a:rPr>
               <a:t>مِنْ نَاحِيَةٍ … وَمِنْ نَاحِيَةٍ أُخْرَى …</a:t>
@@ -6122,6 +6184,7 @@
                   <a:srgbClr val="1B3B6F"/>
                 </a:solidFill>
                 <a:latin typeface="Amiri" pitchFamily="2" charset="-78"/>
+                <a:ea typeface="Amiri" pitchFamily="2" charset="-78"/>
                 <a:cs typeface="Amiri" pitchFamily="2" charset="-78"/>
               </a:rPr>
               <a:t>هَلِ التِّكْنُولُوجْيَا صَدِيقَةٌ لِلْبِيئَةِ؟</a:t>
@@ -6225,6 +6288,7 @@
                   <a:srgbClr val="1B3B6F"/>
                 </a:solidFill>
                 <a:latin typeface="Amiri" pitchFamily="2" charset="-78"/>
+                <a:ea typeface="Amiri" pitchFamily="2" charset="-78"/>
                 <a:cs typeface="Amiri" pitchFamily="2" charset="-78"/>
               </a:rPr>
               <a:t>تُرْمَى … ، مِمَّا …</a:t>
@@ -6301,6 +6365,7 @@
                   <a:srgbClr val="1B3B6F"/>
                 </a:solidFill>
                 <a:latin typeface="Amiri" pitchFamily="2" charset="-78"/>
+                <a:ea typeface="Amiri" pitchFamily="2" charset="-78"/>
                 <a:cs typeface="Amiri" pitchFamily="2" charset="-78"/>
               </a:rPr>
               <a:t>وَمَا نَتِيجَةُ رَمْيِ الأَجْهِزَةِ؟</a:t>
@@ -6404,6 +6469,7 @@
                   <a:srgbClr val="1B3B6F"/>
                 </a:solidFill>
                 <a:latin typeface="Amiri" pitchFamily="2" charset="-78"/>
+                <a:ea typeface="Amiri" pitchFamily="2" charset="-78"/>
                 <a:cs typeface="Amiri" pitchFamily="2" charset="-78"/>
               </a:rPr>
               <a:t>نَعَمْ، … بَدَلًا مِنْ … فَوَفَّرْتُ …</a:t>
@@ -6480,6 +6546,7 @@
                   <a:srgbClr val="1B3B6F"/>
                 </a:solidFill>
                 <a:latin typeface="Amiri" pitchFamily="2" charset="-78"/>
+                <a:ea typeface="Amiri" pitchFamily="2" charset="-78"/>
                 <a:cs typeface="Amiri" pitchFamily="2" charset="-78"/>
               </a:rPr>
               <a:t>هَلْ غَيَّرْتَ عَادَاتِكَ الرَّقْمِيَّةَ؟</a:t>
@@ -6583,6 +6650,7 @@
                   <a:srgbClr val="1B3B6F"/>
                 </a:solidFill>
                 <a:latin typeface="Amiri" pitchFamily="2" charset="-78"/>
+                <a:ea typeface="Amiri" pitchFamily="2" charset="-78"/>
                 <a:cs typeface="Amiri" pitchFamily="2" charset="-78"/>
               </a:rPr>
               <a:t>صَحِيحٌ أَنَّ … غَيْرَ أَنَّ … يَجِبُ عَلَى …</a:t>
@@ -6659,6 +6727,7 @@
                   <a:srgbClr val="1B3B6F"/>
                 </a:solidFill>
                 <a:latin typeface="Amiri" pitchFamily="2" charset="-78"/>
+                <a:ea typeface="Amiri" pitchFamily="2" charset="-78"/>
                 <a:cs typeface="Amiri" pitchFamily="2" charset="-78"/>
               </a:rPr>
               <a:t>لٰكِنَّ الشَّرِكَاتِ تُرِيدُ أَنْ نَشْتَرِيَ دَائِمًا.</a:t>
@@ -6762,6 +6831,7 @@
                   <a:srgbClr val="1B3B6F"/>
                 </a:solidFill>
                 <a:latin typeface="Amiri" pitchFamily="2" charset="-78"/>
+                <a:ea typeface="Amiri" pitchFamily="2" charset="-78"/>
                 <a:cs typeface="Amiri" pitchFamily="2" charset="-78"/>
               </a:rPr>
               <a:t>لَوِ اخْتَرَعْتُ …، لَصَنَعْتُ …</a:t>
@@ -6838,6 +6908,7 @@
                   <a:srgbClr val="1B3B6F"/>
                 </a:solidFill>
                 <a:latin typeface="Amiri" pitchFamily="2" charset="-78"/>
+                <a:ea typeface="Amiri" pitchFamily="2" charset="-78"/>
                 <a:cs typeface="Amiri" pitchFamily="2" charset="-78"/>
               </a:rPr>
               <a:t>لَوِ اخْتَرَعْتَ جِهَازًا لِحِمَايَةِ البِيئَةِ، مَاذَا يَكُونُ؟</a:t>
@@ -7047,6 +7118,7 @@
                   <a:srgbClr val="D4AF37"/>
                 </a:solidFill>
                 <a:latin typeface="Amiri" pitchFamily="2" charset="-78"/>
+                <a:ea typeface="Amiri" pitchFamily="2" charset="-78"/>
                 <a:cs typeface="Amiri" pitchFamily="2" charset="-78"/>
               </a:rPr>
               <a:t>م</a:t>
@@ -7367,6 +7439,7 @@
                   <a:srgbClr val="8A6D1E"/>
                 </a:solidFill>
                 <a:latin typeface="Amiri" pitchFamily="2" charset="-78"/>
+                <a:ea typeface="Amiri" pitchFamily="2" charset="-78"/>
                 <a:cs typeface="Amiri" pitchFamily="2" charset="-78"/>
               </a:rPr>
               <a:t>وَرَقَةُ المُلَاحِظِ</a:t>
@@ -8837,6 +8910,7 @@
                   <a:srgbClr val="D4AF37"/>
                 </a:solidFill>
                 <a:latin typeface="Amiri" pitchFamily="2" charset="-78"/>
+                <a:ea typeface="Amiri" pitchFamily="2" charset="-78"/>
                 <a:cs typeface="Amiri" pitchFamily="2" charset="-78"/>
               </a:rPr>
               <a:t>م</a:t>
@@ -9157,6 +9231,7 @@
                   <a:srgbClr val="8A6D1E"/>
                 </a:solidFill>
                 <a:latin typeface="Amiri" pitchFamily="2" charset="-78"/>
+                <a:ea typeface="Amiri" pitchFamily="2" charset="-78"/>
                 <a:cs typeface="Amiri" pitchFamily="2" charset="-78"/>
               </a:rPr>
               <a:t>نَمُوذَجُ الإِجَابَةِ</a:t>
@@ -9399,6 +9474,7 @@
                   <a:srgbClr val="1B3B6F"/>
                 </a:solidFill>
                 <a:latin typeface="Amiri" pitchFamily="2" charset="-78"/>
+                <a:ea typeface="Amiri" pitchFamily="2" charset="-78"/>
                 <a:cs typeface="Amiri" pitchFamily="2" charset="-78"/>
               </a:rPr>
               <a:t>أَيْنَ يَقَعُ المُتْحَفُ الأُرْدُنِيُّ، مِنْ فَضْلِكَ؟</a:t>
@@ -9475,6 +9551,7 @@
                   <a:srgbClr val="1B3B6F"/>
                 </a:solidFill>
                 <a:latin typeface="Amiri" pitchFamily="2" charset="-78"/>
+                <a:ea typeface="Amiri" pitchFamily="2" charset="-78"/>
                 <a:cs typeface="Amiri" pitchFamily="2" charset="-78"/>
               </a:rPr>
               <a:t>أَهْلًا! كَيْفَ أُسَاعِدُكَ؟</a:t>
@@ -9578,6 +9655,7 @@
                   <a:srgbClr val="1B3B6F"/>
                 </a:solidFill>
                 <a:latin typeface="Amiri" pitchFamily="2" charset="-78"/>
+                <a:ea typeface="Amiri" pitchFamily="2" charset="-78"/>
                 <a:cs typeface="Amiri" pitchFamily="2" charset="-78"/>
               </a:rPr>
               <a:t>مَتَى يَفْتَحُ المُتْحَفُ؟</a:t>
@@ -9654,6 +9732,7 @@
                   <a:srgbClr val="1B3B6F"/>
                 </a:solidFill>
                 <a:latin typeface="Amiri" pitchFamily="2" charset="-78"/>
+                <a:ea typeface="Amiri" pitchFamily="2" charset="-78"/>
                 <a:cs typeface="Amiri" pitchFamily="2" charset="-78"/>
               </a:rPr>
               <a:t>فِي وَسَطِ المَدِينَةِ، مُقَابِلَ البَلَدِيَّةِ.</a:t>
@@ -9757,6 +9836,7 @@
                   <a:srgbClr val="1B3B6F"/>
                 </a:solidFill>
                 <a:latin typeface="Amiri" pitchFamily="2" charset="-78"/>
+                <a:ea typeface="Amiri" pitchFamily="2" charset="-78"/>
                 <a:cs typeface="Amiri" pitchFamily="2" charset="-78"/>
               </a:rPr>
               <a:t>نَعَمْ، سَأَبْقَى فِي الأُرْدُنِّ أُسْبُوعًا.</a:t>
@@ -9833,6 +9913,7 @@
                   <a:srgbClr val="1B3B6F"/>
                 </a:solidFill>
                 <a:latin typeface="Amiri" pitchFamily="2" charset="-78"/>
+                <a:ea typeface="Amiri" pitchFamily="2" charset="-78"/>
                 <a:cs typeface="Amiri" pitchFamily="2" charset="-78"/>
               </a:rPr>
               <a:t>فِي التَّاسِعَةِ صَبَاحًا. هَلْ هٰذِهِ أَوَّلُ زِيَارَةٍ لَكَ؟</a:t>
@@ -9936,6 +10017,7 @@
                   <a:srgbClr val="1B3B6F"/>
                 </a:solidFill>
                 <a:latin typeface="Amiri" pitchFamily="2" charset="-78"/>
+                <a:ea typeface="Amiri" pitchFamily="2" charset="-78"/>
                 <a:cs typeface="Amiri" pitchFamily="2" charset="-78"/>
               </a:rPr>
               <a:t>كَيْفَ سَيَكُونُ الجَوُّ غَدًا؟</a:t>
@@ -10012,6 +10094,7 @@
                   <a:srgbClr val="1B3B6F"/>
                 </a:solidFill>
                 <a:latin typeface="Amiri" pitchFamily="2" charset="-78"/>
+                <a:ea typeface="Amiri" pitchFamily="2" charset="-78"/>
                 <a:cs typeface="Amiri" pitchFamily="2" charset="-78"/>
               </a:rPr>
               <a:t>مُمْتَازٌ!</a:t>
@@ -10115,6 +10198,7 @@
                   <a:srgbClr val="1B3B6F"/>
                 </a:solidFill>
                 <a:latin typeface="Amiri" pitchFamily="2" charset="-78"/>
+                <a:ea typeface="Amiri" pitchFamily="2" charset="-78"/>
                 <a:cs typeface="Amiri" pitchFamily="2" charset="-78"/>
               </a:rPr>
               <a:t>الجَوُّ بَارِدٌ، وَتُمْطِرُ كَثِيرًا.</a:t>
@@ -10191,6 +10275,7 @@
                   <a:srgbClr val="1B3B6F"/>
                 </a:solidFill>
                 <a:latin typeface="Amiri" pitchFamily="2" charset="-78"/>
+                <a:ea typeface="Amiri" pitchFamily="2" charset="-78"/>
                 <a:cs typeface="Amiri" pitchFamily="2" charset="-78"/>
               </a:rPr>
               <a:t>مُشْمِسًا وَحَارًّا. كَيْفَ الجَوُّ فِي بَلَدِكَ الآنَ؟</a:t>
@@ -10400,6 +10485,7 @@
                   <a:srgbClr val="D4AF37"/>
                 </a:solidFill>
                 <a:latin typeface="Amiri" pitchFamily="2" charset="-78"/>
+                <a:ea typeface="Amiri" pitchFamily="2" charset="-78"/>
                 <a:cs typeface="Amiri" pitchFamily="2" charset="-78"/>
               </a:rPr>
               <a:t>م</a:t>
@@ -10720,6 +10806,7 @@
                   <a:srgbClr val="8A6D1E"/>
                 </a:solidFill>
                 <a:latin typeface="Amiri" pitchFamily="2" charset="-78"/>
+                <a:ea typeface="Amiri" pitchFamily="2" charset="-78"/>
                 <a:cs typeface="Amiri" pitchFamily="2" charset="-78"/>
               </a:rPr>
               <a:t>نَمُوذَجُ الإِجَابَةِ</a:t>
@@ -10962,6 +11049,7 @@
                   <a:srgbClr val="1B3B6F"/>
                 </a:solidFill>
                 <a:latin typeface="Amiri" pitchFamily="2" charset="-78"/>
+                <a:ea typeface="Amiri" pitchFamily="2" charset="-78"/>
                 <a:cs typeface="Amiri" pitchFamily="2" charset="-78"/>
               </a:rPr>
               <a:t>صَبَاحَ النُّورِ، أُرِيدُ أَنْ أَحْجِزَ غُرْفَةً لِشَخْصَيْنِ.</a:t>
@@ -11038,6 +11126,7 @@
                   <a:srgbClr val="1B3B6F"/>
                 </a:solidFill>
                 <a:latin typeface="Amiri" pitchFamily="2" charset="-78"/>
+                <a:ea typeface="Amiri" pitchFamily="2" charset="-78"/>
                 <a:cs typeface="Amiri" pitchFamily="2" charset="-78"/>
               </a:rPr>
               <a:t>فُنْدُقُ البَحْرِ، صَبَاحَ الخَيْرِ.</a:t>
@@ -11141,6 +11230,7 @@
                   <a:srgbClr val="1B3B6F"/>
                 </a:solidFill>
                 <a:latin typeface="Amiri" pitchFamily="2" charset="-78"/>
+                <a:ea typeface="Amiri" pitchFamily="2" charset="-78"/>
                 <a:cs typeface="Amiri" pitchFamily="2" charset="-78"/>
               </a:rPr>
               <a:t>لِثَلَاثِ لَيَالٍ، مِنَ العَاشِرِ إِلَى الثَّالِثَ عَشَرَ مِنْ يُولْيُو.</a:t>
@@ -11217,6 +11307,7 @@
                   <a:srgbClr val="1B3B6F"/>
                 </a:solidFill>
                 <a:latin typeface="Amiri" pitchFamily="2" charset="-78"/>
+                <a:ea typeface="Amiri" pitchFamily="2" charset="-78"/>
                 <a:cs typeface="Amiri" pitchFamily="2" charset="-78"/>
               </a:rPr>
               <a:t>لِكَمْ لَيْلَةً؟</a:t>
@@ -11320,6 +11411,7 @@
                   <a:srgbClr val="1B3B6F"/>
                 </a:solidFill>
                 <a:latin typeface="Amiri" pitchFamily="2" charset="-78"/>
+                <a:ea typeface="Amiri" pitchFamily="2" charset="-78"/>
                 <a:cs typeface="Amiri" pitchFamily="2" charset="-78"/>
               </a:rPr>
               <a:t>سَآخُذُ الغُرْفَةَ الثَّانِيَةَ، لِأَنَّهَا أَرْخَصُ، وَسَنَقْضِي أَكْثَرَ الوَقْتِ خَارِجَ الفُنْدُقِ.</a:t>
@@ -11399,6 +11491,7 @@
                   <a:srgbClr val="1B3B6F"/>
                 </a:solidFill>
                 <a:latin typeface="Amiri" pitchFamily="2" charset="-78"/>
+                <a:ea typeface="Amiri" pitchFamily="2" charset="-78"/>
                 <a:cs typeface="Amiri" pitchFamily="2" charset="-78"/>
               </a:rPr>
               <a:t>عِنْدَنَا غُرْفَةٌ تُطِلُّ عَلَى البَحْرِ بِمِئَةِ دِينَارٍ، وَغُرْفَةٌ أُخْرَى بِسَبْعِينَ.</a:t>
@@ -11502,6 +11595,7 @@
                   <a:srgbClr val="1B3B6F"/>
                 </a:solidFill>
                 <a:latin typeface="Amiri" pitchFamily="2" charset="-78"/>
+                <a:ea typeface="Amiri" pitchFamily="2" charset="-78"/>
                 <a:cs typeface="Amiri" pitchFamily="2" charset="-78"/>
               </a:rPr>
               <a:t>هَلْ يُوجَدُ إِنْتَرْنِتٌ مَجَّانِيٌّ؟ وَهَلِ الفُطُورُ مَشْمُولٌ فِي السِّعْرِ؟</a:t>
@@ -11578,6 +11672,7 @@
                   <a:srgbClr val="1B3B6F"/>
                 </a:solidFill>
                 <a:latin typeface="Amiri" pitchFamily="2" charset="-78"/>
+                <a:ea typeface="Amiri" pitchFamily="2" charset="-78"/>
                 <a:cs typeface="Amiri" pitchFamily="2" charset="-78"/>
               </a:rPr>
               <a:t>حَسَنًا.</a:t>
@@ -11681,6 +11776,7 @@
                   <a:srgbClr val="1B3B6F"/>
                 </a:solidFill>
                 <a:latin typeface="Amiri" pitchFamily="2" charset="-78"/>
+                <a:ea typeface="Amiri" pitchFamily="2" charset="-78"/>
                 <a:cs typeface="Amiri" pitchFamily="2" charset="-78"/>
               </a:rPr>
               <a:t>سَنَصِلُ بِالطَّائِرَةِ إِلَى عَمَّانَ، ثُمَّ سَنَسْتَأْجِرُ سَيَّارَةً إِلَى العَقَبَةِ.</a:t>
@@ -11757,6 +11853,7 @@
                   <a:srgbClr val="1B3B6F"/>
                 </a:solidFill>
                 <a:latin typeface="Amiri" pitchFamily="2" charset="-78"/>
+                <a:ea typeface="Amiri" pitchFamily="2" charset="-78"/>
                 <a:cs typeface="Amiri" pitchFamily="2" charset="-78"/>
               </a:rPr>
               <a:t>نَعَمْ لِلِاثْنَيْنِ. كَيْفَ سَتَصِلُونَ إِلَى الفُنْدُقِ؟</a:t>
@@ -11966,6 +12063,7 @@
                   <a:srgbClr val="D4AF37"/>
                 </a:solidFill>
                 <a:latin typeface="Amiri" pitchFamily="2" charset="-78"/>
+                <a:ea typeface="Amiri" pitchFamily="2" charset="-78"/>
                 <a:cs typeface="Amiri" pitchFamily="2" charset="-78"/>
               </a:rPr>
               <a:t>م</a:t>
@@ -12286,6 +12384,7 @@
                   <a:srgbClr val="8A6D1E"/>
                 </a:solidFill>
                 <a:latin typeface="Amiri" pitchFamily="2" charset="-78"/>
+                <a:ea typeface="Amiri" pitchFamily="2" charset="-78"/>
                 <a:cs typeface="Amiri" pitchFamily="2" charset="-78"/>
               </a:rPr>
               <a:t>نَمُوذَجُ الإِجَابَةِ</a:t>
@@ -12528,6 +12627,7 @@
                   <a:srgbClr val="1B3B6F"/>
                 </a:solidFill>
                 <a:latin typeface="Amiri" pitchFamily="2" charset="-78"/>
+                <a:ea typeface="Amiri" pitchFamily="2" charset="-78"/>
                 <a:cs typeface="Amiri" pitchFamily="2" charset="-78"/>
               </a:rPr>
               <a:t>أَكْبَرُ مُشْكِلَةٍ تَلَوُّثُ الهَوَاءِ، بِسَبَبِ الزِّحَامِ الشَّدِيدِ وَكَثْرَةِ السَّيَّارَاتِ القَدِيمَةِ.</a:t>
@@ -12604,6 +12704,7 @@
                   <a:srgbClr val="1B3B6F"/>
                 </a:solidFill>
                 <a:latin typeface="Amiri" pitchFamily="2" charset="-78"/>
+                <a:ea typeface="Amiri" pitchFamily="2" charset="-78"/>
                 <a:cs typeface="Amiri" pitchFamily="2" charset="-78"/>
               </a:rPr>
               <a:t>مَا أَكْبَرُ مُشْكِلَةٍ بِيئِيَّةٍ فِي مَدِينَتِكَ؟</a:t>
@@ -12707,6 +12808,7 @@
                   <a:srgbClr val="1B3B6F"/>
                 </a:solidFill>
                 <a:latin typeface="Amiri" pitchFamily="2" charset="-78"/>
+                <a:ea typeface="Amiri" pitchFamily="2" charset="-78"/>
                 <a:cs typeface="Amiri" pitchFamily="2" charset="-78"/>
               </a:rPr>
               <a:t>يَمْتَلِئُ الهَوَاءُ بِالدُّخَانِ، مِمَّا يُؤَدِّي إِلَى أَمْرَاضِ الرِّئَةِ، خُصُوصًا عِنْدَ الأَطْفَالِ وَكِبَارِ السِّنِّ.</a:t>
@@ -12783,6 +12885,7 @@
                   <a:srgbClr val="1B3B6F"/>
                 </a:solidFill>
                 <a:latin typeface="Amiri" pitchFamily="2" charset="-78"/>
+                <a:ea typeface="Amiri" pitchFamily="2" charset="-78"/>
                 <a:cs typeface="Amiri" pitchFamily="2" charset="-78"/>
               </a:rPr>
               <a:t>وَمَا نَتَائِجُهَا؟</a:t>
@@ -12886,6 +12989,7 @@
                   <a:srgbClr val="1B3B6F"/>
                 </a:solidFill>
                 <a:latin typeface="Amiri" pitchFamily="2" charset="-78"/>
+                <a:ea typeface="Amiri" pitchFamily="2" charset="-78"/>
                 <a:cs typeface="Amiri" pitchFamily="2" charset="-78"/>
               </a:rPr>
               <a:t>نَظَّمْنَا يَوْمًا بِلَا سَيَّارَاتٍ فِي حَيِّ المَدْرَسَةِ، وَزُرِعَتْ خَمْسُونَ شَجَرَةً عَلَى جَانِبَيِ الشَّارِعِ.</a:t>
@@ -12962,6 +13066,7 @@
                   <a:srgbClr val="1B3B6F"/>
                 </a:solidFill>
                 <a:latin typeface="Amiri" pitchFamily="2" charset="-78"/>
+                <a:ea typeface="Amiri" pitchFamily="2" charset="-78"/>
                 <a:cs typeface="Amiri" pitchFamily="2" charset="-78"/>
               </a:rPr>
               <a:t>مَاذَا فَعَلَ نَادِيكُمْ؟</a:t>
@@ -13065,6 +13170,7 @@
                   <a:srgbClr val="1B3B6F"/>
                 </a:solidFill>
                 <a:latin typeface="Amiri" pitchFamily="2" charset="-78"/>
+                <a:ea typeface="Amiri" pitchFamily="2" charset="-78"/>
                 <a:cs typeface="Amiri" pitchFamily="2" charset="-78"/>
               </a:rPr>
               <a:t>يَجِبُ عَلَى البَلَدِيَّةِ أَنْ تُحَسِّنَ الحَافِلَاتِ العَامَّةَ، وَأَنْ تَبْنِيَ طُرُقًا آمِنَةً لِلدَّرَّاجَاتِ.</a:t>
@@ -13141,6 +13247,7 @@
                   <a:srgbClr val="1B3B6F"/>
                 </a:solidFill>
                 <a:latin typeface="Amiri" pitchFamily="2" charset="-78"/>
+                <a:ea typeface="Amiri" pitchFamily="2" charset="-78"/>
                 <a:cs typeface="Amiri" pitchFamily="2" charset="-78"/>
               </a:rPr>
               <a:t>وَمَاذَا يَجِبُ أَنْ تَفْعَلَ البَلَدِيَّةُ؟</a:t>
@@ -13244,6 +13351,7 @@
                   <a:srgbClr val="1B3B6F"/>
                 </a:solidFill>
                 <a:latin typeface="Amiri" pitchFamily="2" charset="-78"/>
+                <a:ea typeface="Amiri" pitchFamily="2" charset="-78"/>
                 <a:cs typeface="Amiri" pitchFamily="2" charset="-78"/>
               </a:rPr>
               <a:t>كَانَتْ أَهْدَأَ وَأَنْظَفَ، أَمَّا الآنَ فَهِيَ أَكْبَرُ وَأَكْثَرُ ازْدِحَامًا، لٰكِنَّ النَّاسَ أَكْثَرُ وَعْيًا بِالبِيئَةِ.</a:t>
@@ -13320,6 +13428,7 @@
                   <a:srgbClr val="1B3B6F"/>
                 </a:solidFill>
                 <a:latin typeface="Amiri" pitchFamily="2" charset="-78"/>
+                <a:ea typeface="Amiri" pitchFamily="2" charset="-78"/>
                 <a:cs typeface="Amiri" pitchFamily="2" charset="-78"/>
               </a:rPr>
               <a:t>وَهَلْ تَغَيَّرَتِ المَدِينَةُ مُنْذُ طُفُولَتِكَ؟</a:t>
@@ -13529,6 +13638,7 @@
                   <a:srgbClr val="D4AF37"/>
                 </a:solidFill>
                 <a:latin typeface="Amiri" pitchFamily="2" charset="-78"/>
+                <a:ea typeface="Amiri" pitchFamily="2" charset="-78"/>
                 <a:cs typeface="Amiri" pitchFamily="2" charset="-78"/>
               </a:rPr>
               <a:t>م</a:t>
@@ -13849,6 +13959,7 @@
                   <a:srgbClr val="8A6D1E"/>
                 </a:solidFill>
                 <a:latin typeface="Amiri" pitchFamily="2" charset="-78"/>
+                <a:ea typeface="Amiri" pitchFamily="2" charset="-78"/>
                 <a:cs typeface="Amiri" pitchFamily="2" charset="-78"/>
               </a:rPr>
               <a:t>نَمُوذَجُ الإِجَابَةِ</a:t>
@@ -14094,6 +14205,7 @@
                   <a:srgbClr val="1B3B6F"/>
                 </a:solidFill>
                 <a:latin typeface="Amiri" pitchFamily="2" charset="-78"/>
+                <a:ea typeface="Amiri" pitchFamily="2" charset="-78"/>
                 <a:cs typeface="Amiri" pitchFamily="2" charset="-78"/>
               </a:rPr>
               <a:t>مِنْ نَاحِيَةٍ، تُسَاعِدُنَا الطَّاقَةُ الشَّمْسِيَّةُ وَالسَّيَّارَاتُ الكَهْرَبَائِيَّةُ عَلَى تَقْلِيلِ التَّلَوُّثِ، وَمِنْ نَاحِيَةٍ أُخْرَى، تُرْمَى مَلَايِينُ الأَجْهِزَةِ كُلَّ عَامٍ.</a:t>
@@ -14170,6 +14282,7 @@
                   <a:srgbClr val="1B3B6F"/>
                 </a:solidFill>
                 <a:latin typeface="Amiri" pitchFamily="2" charset="-78"/>
+                <a:ea typeface="Amiri" pitchFamily="2" charset="-78"/>
                 <a:cs typeface="Amiri" pitchFamily="2" charset="-78"/>
               </a:rPr>
               <a:t>هَلِ التِّكْنُولُوجْيَا صَدِيقَةٌ لِلْبِيئَةِ؟</a:t>
@@ -14273,6 +14386,7 @@
                   <a:srgbClr val="1B3B6F"/>
                 </a:solidFill>
                 <a:latin typeface="Amiri" pitchFamily="2" charset="-78"/>
+                <a:ea typeface="Amiri" pitchFamily="2" charset="-78"/>
                 <a:cs typeface="Amiri" pitchFamily="2" charset="-78"/>
               </a:rPr>
               <a:t>تُرْمَى فِي مَكَبَّاتٍ فِي دُوَلٍ فَقِيرَةٍ، فَتُحْرَقُ، مِمَّا يُلَوِّثُ الهَوَاءَ وَالمَاءَ وَيَضُرُّ بِصِحَّةِ الأَطْفَالِ هُنَاكَ.</a:t>
@@ -14349,6 +14463,7 @@
                   <a:srgbClr val="1B3B6F"/>
                 </a:solidFill>
                 <a:latin typeface="Amiri" pitchFamily="2" charset="-78"/>
+                <a:ea typeface="Amiri" pitchFamily="2" charset="-78"/>
                 <a:cs typeface="Amiri" pitchFamily="2" charset="-78"/>
               </a:rPr>
               <a:t>وَمَا نَتِيجَةُ رَمْيِ الأَجْهِزَةِ؟</a:t>
@@ -14452,6 +14567,7 @@
                   <a:srgbClr val="1B3B6F"/>
                 </a:solidFill>
                 <a:latin typeface="Amiri" pitchFamily="2" charset="-78"/>
+                <a:ea typeface="Amiri" pitchFamily="2" charset="-78"/>
                 <a:cs typeface="Amiri" pitchFamily="2" charset="-78"/>
               </a:rPr>
               <a:t>نَعَمْ، أَصْلَحْتُ هَاتِفِي القَدِيمَ بَدَلًا مِنْ شِرَاءِ هَاتِفٍ جَدِيدٍ، فَوَفَّرْتُ مِئَتَيْ جُنَيْهٍ، وَمَنَعْتُ جِهَازًا مِنَ الوُصُولِ إِلَى المَكَبِّ.</a:t>
@@ -14528,6 +14644,7 @@
                   <a:srgbClr val="1B3B6F"/>
                 </a:solidFill>
                 <a:latin typeface="Amiri" pitchFamily="2" charset="-78"/>
+                <a:ea typeface="Amiri" pitchFamily="2" charset="-78"/>
                 <a:cs typeface="Amiri" pitchFamily="2" charset="-78"/>
               </a:rPr>
               <a:t>هَلْ غَيَّرْتَ عَادَاتِكَ الرَّقْمِيَّةَ؟</a:t>
@@ -14631,6 +14748,7 @@
                   <a:srgbClr val="1B3B6F"/>
                 </a:solidFill>
                 <a:latin typeface="Amiri" pitchFamily="2" charset="-78"/>
+                <a:ea typeface="Amiri" pitchFamily="2" charset="-78"/>
                 <a:cs typeface="Amiri" pitchFamily="2" charset="-78"/>
               </a:rPr>
               <a:t>صَحِيحٌ أَنَّ هَدَفَهَا الرِّبْحُ، غَيْرَ أَنَّ القَوَانِينَ تَسْتَطِيعُ أَنْ تُجْبِرَهَا؛ فَيَجِبُ عَلَى الحُكُومَاتِ أَنْ تَفْرِضَ صِنَاعَةَ أَجْهِزَةٍ قَابِلَةٍ لِلْإِصْلَاحِ.</a:t>
@@ -14707,6 +14825,7 @@
                   <a:srgbClr val="1B3B6F"/>
                 </a:solidFill>
                 <a:latin typeface="Amiri" pitchFamily="2" charset="-78"/>
+                <a:ea typeface="Amiri" pitchFamily="2" charset="-78"/>
                 <a:cs typeface="Amiri" pitchFamily="2" charset="-78"/>
               </a:rPr>
               <a:t>لٰكِنَّ الشَّرِكَاتِ تُرِيدُ أَنْ نَشْتَرِيَ دَائِمًا.</a:t>
@@ -14810,6 +14929,7 @@
                   <a:srgbClr val="1B3B6F"/>
                 </a:solidFill>
                 <a:latin typeface="Amiri" pitchFamily="2" charset="-78"/>
+                <a:ea typeface="Amiri" pitchFamily="2" charset="-78"/>
                 <a:cs typeface="Amiri" pitchFamily="2" charset="-78"/>
               </a:rPr>
               <a:t>لَوِ اخْتَرَعْتُ جِهَازًا، لَصَنَعْتُ آلَةً صَغِيرَةً تُحَوِّلُ البْلَاسْتِيكَ فِي البُيُوتِ إِلَى مَوَادَّ لِلْبِنَاءِ، فَلَا يَصِلُ شَيْءٌ إِلَى البَحْرِ.</a:t>
@@ -14886,6 +15006,7 @@
                   <a:srgbClr val="1B3B6F"/>
                 </a:solidFill>
                 <a:latin typeface="Amiri" pitchFamily="2" charset="-78"/>
+                <a:ea typeface="Amiri" pitchFamily="2" charset="-78"/>
                 <a:cs typeface="Amiri" pitchFamily="2" charset="-78"/>
               </a:rPr>
               <a:t>لَوِ اخْتَرَعْتَ جِهَازًا لِحِمَايَةِ البِيئَةِ، مَاذَا يَكُونُ؟</a:t>
@@ -15095,6 +15216,7 @@
                   <a:srgbClr val="D4AF37"/>
                 </a:solidFill>
                 <a:latin typeface="Amiri" pitchFamily="2" charset="-78"/>
+                <a:ea typeface="Amiri" pitchFamily="2" charset="-78"/>
                 <a:cs typeface="Amiri" pitchFamily="2" charset="-78"/>
               </a:rPr>
               <a:t>م</a:t>
@@ -15415,6 +15537,7 @@
                   <a:srgbClr val="8A6D1E"/>
                 </a:solidFill>
                 <a:latin typeface="Amiri" pitchFamily="2" charset="-78"/>
+                <a:ea typeface="Amiri" pitchFamily="2" charset="-78"/>
                 <a:cs typeface="Amiri" pitchFamily="2" charset="-78"/>
               </a:rPr>
               <a:t>مَدِينَتِي وَعَالَمِي</a:t>
@@ -15695,6 +15818,7 @@
                   <a:srgbClr val="1B3B6F"/>
                 </a:solidFill>
                 <a:latin typeface="Amiri" pitchFamily="2" charset="-78"/>
+                <a:ea typeface="Amiri" pitchFamily="2" charset="-78"/>
                 <a:cs typeface="Amiri" pitchFamily="2" charset="-78"/>
               </a:rPr>
               <a:t>تَقَعُ مَدِينَتِي فِي …</a:t>
@@ -15771,6 +15895,7 @@
                   <a:srgbClr val="1B3B6F"/>
                 </a:solidFill>
                 <a:latin typeface="Amiri" pitchFamily="2" charset="-78"/>
+                <a:ea typeface="Amiri" pitchFamily="2" charset="-78"/>
                 <a:cs typeface="Amiri" pitchFamily="2" charset="-78"/>
               </a:rPr>
               <a:t>أَيْنَ تَقَعُ مَدِينَتُكَ؟</a:t>
@@ -15939,6 +16064,7 @@
                   <a:srgbClr val="1B3B6F"/>
                 </a:solidFill>
                 <a:latin typeface="Amiri" pitchFamily="2" charset="-78"/>
+                <a:ea typeface="Amiri" pitchFamily="2" charset="-78"/>
                 <a:cs typeface="Amiri" pitchFamily="2" charset="-78"/>
               </a:rPr>
               <a:t>يُوجَدُ … وَتُوجَدُ …</a:t>
@@ -16015,6 +16141,7 @@
                   <a:srgbClr val="1B3B6F"/>
                 </a:solidFill>
                 <a:latin typeface="Amiri" pitchFamily="2" charset="-78"/>
+                <a:ea typeface="Amiri" pitchFamily="2" charset="-78"/>
                 <a:cs typeface="Amiri" pitchFamily="2" charset="-78"/>
               </a:rPr>
               <a:t>مَاذَا يُوجَدُ فِي حَيِّكَ؟</a:t>
@@ -16183,6 +16310,7 @@
                   <a:srgbClr val="1B3B6F"/>
                 </a:solidFill>
                 <a:latin typeface="Amiri" pitchFamily="2" charset="-78"/>
+                <a:ea typeface="Amiri" pitchFamily="2" charset="-78"/>
                 <a:cs typeface="Amiri" pitchFamily="2" charset="-78"/>
               </a:rPr>
               <a:t>الجَوُّ … وَتُمْطِرُ …</a:t>
@@ -16259,6 +16387,7 @@
                   <a:srgbClr val="1B3B6F"/>
                 </a:solidFill>
                 <a:latin typeface="Amiri" pitchFamily="2" charset="-78"/>
+                <a:ea typeface="Amiri" pitchFamily="2" charset="-78"/>
                 <a:cs typeface="Amiri" pitchFamily="2" charset="-78"/>
               </a:rPr>
               <a:t>كَيْفَ الجَوُّ فِي الشِّتَاءِ؟</a:t>
@@ -16427,6 +16556,7 @@
                   <a:srgbClr val="1B3B6F"/>
                 </a:solidFill>
                 <a:latin typeface="Amiri" pitchFamily="2" charset="-78"/>
+                <a:ea typeface="Amiri" pitchFamily="2" charset="-78"/>
                 <a:cs typeface="Amiri" pitchFamily="2" charset="-78"/>
               </a:rPr>
               <a:t>أُعِيدُ تَدْوِيرَ … / أُطْفِئُ …</a:t>
@@ -16503,6 +16633,7 @@
                   <a:srgbClr val="1B3B6F"/>
                 </a:solidFill>
                 <a:latin typeface="Amiri" pitchFamily="2" charset="-78"/>
+                <a:ea typeface="Amiri" pitchFamily="2" charset="-78"/>
                 <a:cs typeface="Amiri" pitchFamily="2" charset="-78"/>
               </a:rPr>
               <a:t>مَاذَا تَفْعَلُ لِحِمَايَةِ البِيئَةِ؟</a:t>
@@ -16671,6 +16802,7 @@
                   <a:srgbClr val="1B3B6F"/>
                 </a:solidFill>
                 <a:latin typeface="Amiri" pitchFamily="2" charset="-78"/>
+                <a:ea typeface="Amiri" pitchFamily="2" charset="-78"/>
                 <a:cs typeface="Amiri" pitchFamily="2" charset="-78"/>
               </a:rPr>
               <a:t>أَسْتَخْدِمُهُ …</a:t>
@@ -16747,6 +16879,7 @@
                   <a:srgbClr val="1B3B6F"/>
                 </a:solidFill>
                 <a:latin typeface="Amiri" pitchFamily="2" charset="-78"/>
+                <a:ea typeface="Amiri" pitchFamily="2" charset="-78"/>
                 <a:cs typeface="Amiri" pitchFamily="2" charset="-78"/>
               </a:rPr>
               <a:t>كَمْ سَاعَةً تَسْتَخْدِمُ الهَاتِفَ يَوْمِيًّا؟</a:t>
@@ -16901,6 +17034,7 @@
                   <a:srgbClr val="1B3B6F"/>
                 </a:solidFill>
                 <a:latin typeface="Amiri" pitchFamily="2" charset="-78"/>
+                <a:ea typeface="Amiri" pitchFamily="2" charset="-78"/>
                 <a:cs typeface="Amiri" pitchFamily="2" charset="-78"/>
               </a:rPr>
               <a:t>يُوجَدُ</a:t>
@@ -16927,6 +17061,7 @@
                   <a:srgbClr val="1B3B6F"/>
                 </a:solidFill>
                 <a:latin typeface="Amiri" pitchFamily="2" charset="-78"/>
+                <a:ea typeface="Amiri" pitchFamily="2" charset="-78"/>
                 <a:cs typeface="Amiri" pitchFamily="2" charset="-78"/>
               </a:rPr>
               <a:t>تُوجَدُ</a:t>
@@ -16953,6 +17088,7 @@
                   <a:srgbClr val="1B3B6F"/>
                 </a:solidFill>
                 <a:latin typeface="Amiri" pitchFamily="2" charset="-78"/>
+                <a:ea typeface="Amiri" pitchFamily="2" charset="-78"/>
                 <a:cs typeface="Amiri" pitchFamily="2" charset="-78"/>
               </a:rPr>
               <a:t>عَفْوًا، هَلْ يُمْكِنُ أَنْ تُعِيدَ السُّؤَالَ؟</a:t>
@@ -17086,6 +17222,7 @@
                   <a:srgbClr val="D4AF37"/>
                 </a:solidFill>
                 <a:latin typeface="Amiri" pitchFamily="2" charset="-78"/>
+                <a:ea typeface="Amiri" pitchFamily="2" charset="-78"/>
                 <a:cs typeface="Amiri" pitchFamily="2" charset="-78"/>
               </a:rPr>
               <a:t>م</a:t>
@@ -17406,6 +17543,7 @@
                   <a:srgbClr val="8A6D1E"/>
                 </a:solidFill>
                 <a:latin typeface="Amiri" pitchFamily="2" charset="-78"/>
+                <a:ea typeface="Amiri" pitchFamily="2" charset="-78"/>
                 <a:cs typeface="Amiri" pitchFamily="2" charset="-78"/>
               </a:rPr>
               <a:t>البِيئَةُ وَالمَدِينَةُ وَالتِّكْنُولُوجْيَا</a:t>
@@ -17686,6 +17824,7 @@
                   <a:srgbClr val="1B3B6F"/>
                 </a:solidFill>
                 <a:latin typeface="Amiri" pitchFamily="2" charset="-78"/>
+                <a:ea typeface="Amiri" pitchFamily="2" charset="-78"/>
                 <a:cs typeface="Amiri" pitchFamily="2" charset="-78"/>
               </a:rPr>
               <a:t>زُرْتُ … ؛ كَانَتِ … وَكَانَ …</a:t>
@@ -17762,6 +17901,7 @@
                   <a:srgbClr val="1B3B6F"/>
                 </a:solidFill>
                 <a:latin typeface="Amiri" pitchFamily="2" charset="-78"/>
+                <a:ea typeface="Amiri" pitchFamily="2" charset="-78"/>
                 <a:cs typeface="Amiri" pitchFamily="2" charset="-78"/>
               </a:rPr>
               <a:t>صِفْ مَكَانًا طَبِيعِيًّا جَمِيلًا زُرْتَهُ.</a:t>
@@ -17865,6 +18005,7 @@
                   <a:srgbClr val="1B3B6F"/>
                 </a:solidFill>
                 <a:latin typeface="Amiri" pitchFamily="2" charset="-78"/>
+                <a:ea typeface="Amiri" pitchFamily="2" charset="-78"/>
                 <a:cs typeface="Amiri" pitchFamily="2" charset="-78"/>
               </a:rPr>
               <a:t>يُرْمَى … مِمَّا … ؛ لِذٰلِكَ …</a:t>
@@ -17941,6 +18082,7 @@
                   <a:srgbClr val="1B3B6F"/>
                 </a:solidFill>
                 <a:latin typeface="Amiri" pitchFamily="2" charset="-78"/>
+                <a:ea typeface="Amiri" pitchFamily="2" charset="-78"/>
                 <a:cs typeface="Amiri" pitchFamily="2" charset="-78"/>
               </a:rPr>
               <a:t>مَا مُشْكِلَةُ البْلَاسْتِيكِ؟</a:t>
@@ -18044,6 +18186,7 @@
                   <a:srgbClr val="1B3B6F"/>
                 </a:solidFill>
                 <a:latin typeface="Amiri" pitchFamily="2" charset="-78"/>
+                <a:ea typeface="Amiri" pitchFamily="2" charset="-78"/>
                 <a:cs typeface="Amiri" pitchFamily="2" charset="-78"/>
               </a:rPr>
               <a:t>أَبْحَثُ عَنْ … ، وَأُشَاهِدُ … ، لٰكِنَّ …</a:t>
@@ -18120,6 +18263,7 @@
                   <a:srgbClr val="1B3B6F"/>
                 </a:solidFill>
                 <a:latin typeface="Amiri" pitchFamily="2" charset="-78"/>
+                <a:ea typeface="Amiri" pitchFamily="2" charset="-78"/>
                 <a:cs typeface="Amiri" pitchFamily="2" charset="-78"/>
               </a:rPr>
               <a:t>كَيْفَ تَسْتَخْدِمُ الإِنْتَرْنِتَ لِلدِّرَاسَةِ؟</a:t>
@@ -18223,6 +18367,7 @@
                   <a:srgbClr val="1B3B6F"/>
                 </a:solidFill>
                 <a:latin typeface="Amiri" pitchFamily="2" charset="-78"/>
+                <a:ea typeface="Amiri" pitchFamily="2" charset="-78"/>
                 <a:cs typeface="Amiri" pitchFamily="2" charset="-78"/>
               </a:rPr>
               <a:t>كَانَ النَّاسُ … أَمَّا اليَوْمَ فَنَشْتَرِي …</a:t>
@@ -18299,6 +18444,7 @@
                   <a:srgbClr val="1B3B6F"/>
                 </a:solidFill>
                 <a:latin typeface="Amiri" pitchFamily="2" charset="-78"/>
+                <a:ea typeface="Amiri" pitchFamily="2" charset="-78"/>
                 <a:cs typeface="Amiri" pitchFamily="2" charset="-78"/>
               </a:rPr>
               <a:t>كَيْفَ كَانَ التَّسَوُّقُ فِي المَاضِي؟</a:t>
@@ -18402,6 +18548,7 @@
                   <a:srgbClr val="1B3B6F"/>
                 </a:solidFill>
                 <a:latin typeface="Amiri" pitchFamily="2" charset="-78"/>
+                <a:ea typeface="Amiri" pitchFamily="2" charset="-78"/>
                 <a:cs typeface="Amiri" pitchFamily="2" charset="-78"/>
               </a:rPr>
               <a:t>سَأَسْكُنُ فِي … لِأَنَّ …</a:t>
@@ -18478,6 +18625,7 @@
                   <a:srgbClr val="1B3B6F"/>
                 </a:solidFill>
                 <a:latin typeface="Amiri" pitchFamily="2" charset="-78"/>
+                <a:ea typeface="Amiri" pitchFamily="2" charset="-78"/>
                 <a:cs typeface="Amiri" pitchFamily="2" charset="-78"/>
               </a:rPr>
               <a:t>أَيْنَ تُحِبُّ أَنْ تَسْكُنَ فِي المُسْتَقْبَلِ؟</a:t>
@@ -18687,6 +18835,7 @@
                   <a:srgbClr val="D4AF37"/>
                 </a:solidFill>
                 <a:latin typeface="Amiri" pitchFamily="2" charset="-78"/>
+                <a:ea typeface="Amiri" pitchFamily="2" charset="-78"/>
                 <a:cs typeface="Amiri" pitchFamily="2" charset="-78"/>
               </a:rPr>
               <a:t>م</a:t>
@@ -19007,6 +19156,7 @@
                   <a:srgbClr val="8A6D1E"/>
                 </a:solidFill>
                 <a:latin typeface="Amiri" pitchFamily="2" charset="-78"/>
+                <a:ea typeface="Amiri" pitchFamily="2" charset="-78"/>
                 <a:cs typeface="Amiri" pitchFamily="2" charset="-78"/>
               </a:rPr>
               <a:t>مُسْتَقْبَلُ الكَوْكَبِ</a:t>
@@ -19287,6 +19437,7 @@
                   <a:srgbClr val="1B3B6F"/>
                 </a:solidFill>
                 <a:latin typeface="Amiri" pitchFamily="2" charset="-78"/>
+                <a:ea typeface="Amiri" pitchFamily="2" charset="-78"/>
                 <a:cs typeface="Amiri" pitchFamily="2" charset="-78"/>
               </a:rPr>
               <a:t>أَرَى أَنَّ المَسْؤُولِيَّةَ … ؛ فَيَجِبُ عَلَى … وَعَلَى …</a:t>
@@ -19363,6 +19514,7 @@
                   <a:srgbClr val="1B3B6F"/>
                 </a:solidFill>
                 <a:latin typeface="Amiri" pitchFamily="2" charset="-78"/>
+                <a:ea typeface="Amiri" pitchFamily="2" charset="-78"/>
                 <a:cs typeface="Amiri" pitchFamily="2" charset="-78"/>
               </a:rPr>
               <a:t>مَنِ المَسْؤُولُ عَنْ حِمَايَةِ البِيئَةِ؟</a:t>
@@ -19466,6 +19618,7 @@
                   <a:srgbClr val="1B3B6F"/>
                 </a:solidFill>
                 <a:latin typeface="Amiri" pitchFamily="2" charset="-78"/>
+                <a:ea typeface="Amiri" pitchFamily="2" charset="-78"/>
                 <a:cs typeface="Amiri" pitchFamily="2" charset="-78"/>
               </a:rPr>
               <a:t>صَحِيحٌ أَنَّ … غَيْرَ أَنَّ …</a:t>
@@ -19542,6 +19695,7 @@
                   <a:srgbClr val="1B3B6F"/>
                 </a:solidFill>
                 <a:latin typeface="Amiri" pitchFamily="2" charset="-78"/>
+                <a:ea typeface="Amiri" pitchFamily="2" charset="-78"/>
                 <a:cs typeface="Amiri" pitchFamily="2" charset="-78"/>
               </a:rPr>
               <a:t>هَلْ يَجِبُ أَنْ نُسَافِرَ أَقَلَّ بِالطَّائِرَةِ؟</a:t>
@@ -19645,6 +19799,7 @@
                   <a:srgbClr val="1B3B6F"/>
                 </a:solidFill>
                 <a:latin typeface="Amiri" pitchFamily="2" charset="-78"/>
+                <a:ea typeface="Amiri" pitchFamily="2" charset="-78"/>
                 <a:cs typeface="Amiri" pitchFamily="2" charset="-78"/>
               </a:rPr>
               <a:t>مِنْ نَاحِيَةٍ … وَمِنْ نَاحِيَةٍ أُخْرَى …</a:t>
@@ -19721,6 +19876,7 @@
                   <a:srgbClr val="1B3B6F"/>
                 </a:solidFill>
                 <a:latin typeface="Amiri" pitchFamily="2" charset="-78"/>
+                <a:ea typeface="Amiri" pitchFamily="2" charset="-78"/>
                 <a:cs typeface="Amiri" pitchFamily="2" charset="-78"/>
               </a:rPr>
               <a:t>هَلْ جَعَلَتْنَا التِّكْنُولُوجْيَا أَقْرَبَ أَمْ أَبْعَدَ؟</a:t>
@@ -19824,6 +19980,7 @@
                   <a:srgbClr val="1B3B6F"/>
                 </a:solidFill>
                 <a:latin typeface="Amiri" pitchFamily="2" charset="-78"/>
+                <a:ea typeface="Amiri" pitchFamily="2" charset="-78"/>
                 <a:cs typeface="Amiri" pitchFamily="2" charset="-78"/>
               </a:rPr>
               <a:t>سَتَكُونُ … ، وَسَتُبْنَى … إِذَا …</a:t>
@@ -19900,6 +20057,7 @@
                   <a:srgbClr val="1B3B6F"/>
                 </a:solidFill>
                 <a:latin typeface="Amiri" pitchFamily="2" charset="-78"/>
+                <a:ea typeface="Amiri" pitchFamily="2" charset="-78"/>
                 <a:cs typeface="Amiri" pitchFamily="2" charset="-78"/>
               </a:rPr>
               <a:t>كَيْفَ سَتَكُونُ المُدُنُ بَعْدَ خَمْسِينَ سَنَةً؟</a:t>
@@ -20003,6 +20161,7 @@
                   <a:srgbClr val="1B3B6F"/>
                 </a:solidFill>
                 <a:latin typeface="Amiri" pitchFamily="2" charset="-78"/>
+                <a:ea typeface="Amiri" pitchFamily="2" charset="-78"/>
                 <a:cs typeface="Amiri" pitchFamily="2" charset="-78"/>
               </a:rPr>
               <a:t>لَوْ كُنْتُ …، لَجَعَلْتُ …</a:t>
@@ -20079,6 +20238,7 @@
                   <a:srgbClr val="1B3B6F"/>
                 </a:solidFill>
                 <a:latin typeface="Amiri" pitchFamily="2" charset="-78"/>
+                <a:ea typeface="Amiri" pitchFamily="2" charset="-78"/>
                 <a:cs typeface="Amiri" pitchFamily="2" charset="-78"/>
               </a:rPr>
               <a:t>لَوْ كُنْتَ رَئِيسَ بَلَدِيَّةِ مَدِينَتِكَ، مَاذَا تُغَيِّرُ؟</a:t>
@@ -20288,6 +20448,7 @@
                   <a:srgbClr val="D4AF37"/>
                 </a:solidFill>
                 <a:latin typeface="Amiri" pitchFamily="2" charset="-78"/>
+                <a:ea typeface="Amiri" pitchFamily="2" charset="-78"/>
                 <a:cs typeface="Amiri" pitchFamily="2" charset="-78"/>
               </a:rPr>
               <a:t>م</a:t>
@@ -20608,6 +20769,7 @@
                   <a:srgbClr val="8A6D1E"/>
                 </a:solidFill>
                 <a:latin typeface="Amiri" pitchFamily="2" charset="-78"/>
+                <a:ea typeface="Amiri" pitchFamily="2" charset="-78"/>
                 <a:cs typeface="Amiri" pitchFamily="2" charset="-78"/>
               </a:rPr>
               <a:t>آدَابُ الصَّفِّ</a:t>
@@ -22139,6 +22301,7 @@
                   <a:srgbClr val="D4AF37"/>
                 </a:solidFill>
                 <a:latin typeface="Amiri" pitchFamily="2" charset="-78"/>
+                <a:ea typeface="Amiri" pitchFamily="2" charset="-78"/>
                 <a:cs typeface="Amiri" pitchFamily="2" charset="-78"/>
               </a:rPr>
               <a:t>م</a:t>
@@ -22459,6 +22622,7 @@
                   <a:srgbClr val="8A6D1E"/>
                 </a:solidFill>
                 <a:latin typeface="Amiri" pitchFamily="2" charset="-78"/>
+                <a:ea typeface="Amiri" pitchFamily="2" charset="-78"/>
                 <a:cs typeface="Amiri" pitchFamily="2" charset="-78"/>
               </a:rPr>
               <a:t>نَمُوذَجُ الإِجَابَةِ</a:t>
@@ -22701,6 +22865,7 @@
                   <a:srgbClr val="1B3B6F"/>
                 </a:solidFill>
                 <a:latin typeface="Amiri" pitchFamily="2" charset="-78"/>
+                <a:ea typeface="Amiri" pitchFamily="2" charset="-78"/>
                 <a:cs typeface="Amiri" pitchFamily="2" charset="-78"/>
               </a:rPr>
               <a:t>تَقَعُ مَدِينَتِي فِي شَمَالِ إِنْجِلْتِرَا.</a:t>
@@ -22777,6 +22942,7 @@
                   <a:srgbClr val="1B3B6F"/>
                 </a:solidFill>
                 <a:latin typeface="Amiri" pitchFamily="2" charset="-78"/>
+                <a:ea typeface="Amiri" pitchFamily="2" charset="-78"/>
                 <a:cs typeface="Amiri" pitchFamily="2" charset="-78"/>
               </a:rPr>
               <a:t>أَيْنَ تَقَعُ مَدِينَتُكَ؟</a:t>
@@ -22880,6 +23046,7 @@
                   <a:srgbClr val="1B3B6F"/>
                 </a:solidFill>
                 <a:latin typeface="Amiri" pitchFamily="2" charset="-78"/>
+                <a:ea typeface="Amiri" pitchFamily="2" charset="-78"/>
                 <a:cs typeface="Amiri" pitchFamily="2" charset="-78"/>
               </a:rPr>
               <a:t>يُوجَدُ مَسْجِدٌ، وَتُوجَدُ حَدِيقَةٌ كَبِيرَةٌ.</a:t>
@@ -22956,6 +23123,7 @@
                   <a:srgbClr val="1B3B6F"/>
                 </a:solidFill>
                 <a:latin typeface="Amiri" pitchFamily="2" charset="-78"/>
+                <a:ea typeface="Amiri" pitchFamily="2" charset="-78"/>
                 <a:cs typeface="Amiri" pitchFamily="2" charset="-78"/>
               </a:rPr>
               <a:t>مَاذَا يُوجَدُ فِي حَيِّكَ؟</a:t>
@@ -23059,6 +23227,7 @@
                   <a:srgbClr val="1B3B6F"/>
                 </a:solidFill>
                 <a:latin typeface="Amiri" pitchFamily="2" charset="-78"/>
+                <a:ea typeface="Amiri" pitchFamily="2" charset="-78"/>
                 <a:cs typeface="Amiri" pitchFamily="2" charset="-78"/>
               </a:rPr>
               <a:t>الجَوُّ بَارِدٌ، وَتُمْطِرُ كَثِيرًا.</a:t>
@@ -23135,6 +23304,7 @@
                   <a:srgbClr val="1B3B6F"/>
                 </a:solidFill>
                 <a:latin typeface="Amiri" pitchFamily="2" charset="-78"/>
+                <a:ea typeface="Amiri" pitchFamily="2" charset="-78"/>
                 <a:cs typeface="Amiri" pitchFamily="2" charset="-78"/>
               </a:rPr>
               <a:t>كَيْفَ الجَوُّ فِي الشِّتَاءِ؟</a:t>
@@ -23238,6 +23408,7 @@
                   <a:srgbClr val="1B3B6F"/>
                 </a:solidFill>
                 <a:latin typeface="Amiri" pitchFamily="2" charset="-78"/>
+                <a:ea typeface="Amiri" pitchFamily="2" charset="-78"/>
                 <a:cs typeface="Amiri" pitchFamily="2" charset="-78"/>
               </a:rPr>
               <a:t>أُعِيدُ تَدْوِيرَ البْلَاسْتِيكِ وَالوَرَقِ.</a:t>
@@ -23314,6 +23485,7 @@
                   <a:srgbClr val="1B3B6F"/>
                 </a:solidFill>
                 <a:latin typeface="Amiri" pitchFamily="2" charset="-78"/>
+                <a:ea typeface="Amiri" pitchFamily="2" charset="-78"/>
                 <a:cs typeface="Amiri" pitchFamily="2" charset="-78"/>
               </a:rPr>
               <a:t>مَاذَا تَفْعَلُ لِحِمَايَةِ البِيئَةِ؟</a:t>
@@ -23417,6 +23589,7 @@
                   <a:srgbClr val="1B3B6F"/>
                 </a:solidFill>
                 <a:latin typeface="Amiri" pitchFamily="2" charset="-78"/>
+                <a:ea typeface="Amiri" pitchFamily="2" charset="-78"/>
                 <a:cs typeface="Amiri" pitchFamily="2" charset="-78"/>
               </a:rPr>
               <a:t>أَسْتَخْدِمُهُ سَاعَتَيْنِ تَقْرِيبًا.</a:t>
@@ -23493,6 +23666,7 @@
                   <a:srgbClr val="1B3B6F"/>
                 </a:solidFill>
                 <a:latin typeface="Amiri" pitchFamily="2" charset="-78"/>
+                <a:ea typeface="Amiri" pitchFamily="2" charset="-78"/>
                 <a:cs typeface="Amiri" pitchFamily="2" charset="-78"/>
               </a:rPr>
               <a:t>كَمْ سَاعَةً تَسْتَخْدِمُ الهَاتِفَ يَوْمِيًّا؟</a:t>
@@ -23702,6 +23876,7 @@
                   <a:srgbClr val="D4AF37"/>
                 </a:solidFill>
                 <a:latin typeface="Amiri" pitchFamily="2" charset="-78"/>
+                <a:ea typeface="Amiri" pitchFamily="2" charset="-78"/>
                 <a:cs typeface="Amiri" pitchFamily="2" charset="-78"/>
               </a:rPr>
               <a:t>م</a:t>
@@ -24022,6 +24197,7 @@
                   <a:srgbClr val="8A6D1E"/>
                 </a:solidFill>
                 <a:latin typeface="Amiri" pitchFamily="2" charset="-78"/>
+                <a:ea typeface="Amiri" pitchFamily="2" charset="-78"/>
                 <a:cs typeface="Amiri" pitchFamily="2" charset="-78"/>
               </a:rPr>
               <a:t>نَمُوذَجُ الإِجَابَةِ</a:t>
@@ -24264,6 +24440,7 @@
                   <a:srgbClr val="1B3B6F"/>
                 </a:solidFill>
                 <a:latin typeface="Amiri" pitchFamily="2" charset="-78"/>
+                <a:ea typeface="Amiri" pitchFamily="2" charset="-78"/>
                 <a:cs typeface="Amiri" pitchFamily="2" charset="-78"/>
               </a:rPr>
               <a:t>زُرْتُ مِنْطَقَةَ البُحَيْرَاتِ؛ كَانَتِ الجِبَالُ خَضْرَاءَ، وَكَانَ المَاءُ صَافِيًا، لٰكِنَّ الجَوَّ كَانَ مُمْطِرًا طُولَ الوَقْتِ.</a:t>
@@ -24340,6 +24517,7 @@
                   <a:srgbClr val="1B3B6F"/>
                 </a:solidFill>
                 <a:latin typeface="Amiri" pitchFamily="2" charset="-78"/>
+                <a:ea typeface="Amiri" pitchFamily="2" charset="-78"/>
                 <a:cs typeface="Amiri" pitchFamily="2" charset="-78"/>
               </a:rPr>
               <a:t>صِفْ مَكَانًا طَبِيعِيًّا جَمِيلًا زُرْتَهُ.</a:t>
@@ -24443,6 +24621,7 @@
                   <a:srgbClr val="1B3B6F"/>
                 </a:solidFill>
                 <a:latin typeface="Amiri" pitchFamily="2" charset="-78"/>
+                <a:ea typeface="Amiri" pitchFamily="2" charset="-78"/>
                 <a:cs typeface="Amiri" pitchFamily="2" charset="-78"/>
               </a:rPr>
               <a:t>يُرْمَى فِي البَحْرِ، مِمَّا يَقْتُلُ الأَسْمَاكَ وَالسَّلَاحِفَ؛ لِذٰلِكَ يَجِبُ أَنْ نَسْتَخْدِمَ حَقَائِبَ مِنَ القُمَاشِ.</a:t>
@@ -24519,6 +24698,7 @@
                   <a:srgbClr val="1B3B6F"/>
                 </a:solidFill>
                 <a:latin typeface="Amiri" pitchFamily="2" charset="-78"/>
+                <a:ea typeface="Amiri" pitchFamily="2" charset="-78"/>
                 <a:cs typeface="Amiri" pitchFamily="2" charset="-78"/>
               </a:rPr>
               <a:t>مَا مُشْكِلَةُ البْلَاسْتِيكِ؟</a:t>
@@ -24622,6 +24802,7 @@
                   <a:srgbClr val="1B3B6F"/>
                 </a:solidFill>
                 <a:latin typeface="Amiri" pitchFamily="2" charset="-78"/>
+                <a:ea typeface="Amiri" pitchFamily="2" charset="-78"/>
                 <a:cs typeface="Amiri" pitchFamily="2" charset="-78"/>
               </a:rPr>
               <a:t>أَبْحَثُ عَنِ المَعْلُومَاتِ، وَأُشَاهِدُ دُرُوسًا قَصِيرَةً، لٰكِنِّي أُغْلِقُ وَسَائِلَ التَّوَاصُلِ لِكَيْ أُرَكِّزَ.</a:t>
@@ -24698,6 +24879,7 @@
                   <a:srgbClr val="1B3B6F"/>
                 </a:solidFill>
                 <a:latin typeface="Amiri" pitchFamily="2" charset="-78"/>
+                <a:ea typeface="Amiri" pitchFamily="2" charset="-78"/>
                 <a:cs typeface="Amiri" pitchFamily="2" charset="-78"/>
               </a:rPr>
               <a:t>كَيْفَ تَسْتَخْدِمُ الإِنْتَرْنِتَ لِلدِّرَاسَةِ؟</a:t>
@@ -24801,6 +24983,7 @@
                   <a:srgbClr val="1B3B6F"/>
                 </a:solidFill>
                 <a:latin typeface="Amiri" pitchFamily="2" charset="-78"/>
+                <a:ea typeface="Amiri" pitchFamily="2" charset="-78"/>
                 <a:cs typeface="Amiri" pitchFamily="2" charset="-78"/>
               </a:rPr>
               <a:t>كَانَ النَّاسُ يَذْهَبُونَ إِلَى السُّوقِ كُلَّ يَوْمٍ، أَمَّا اليَوْمَ فَنَشْتَرِي عَلَى الإِنْتَرْنِتِ، وَتَصِلُ الطُّلُبَاتُ إِلَى البَيْتِ.</a:t>
@@ -24877,6 +25060,7 @@
                   <a:srgbClr val="1B3B6F"/>
                 </a:solidFill>
                 <a:latin typeface="Amiri" pitchFamily="2" charset="-78"/>
+                <a:ea typeface="Amiri" pitchFamily="2" charset="-78"/>
                 <a:cs typeface="Amiri" pitchFamily="2" charset="-78"/>
               </a:rPr>
               <a:t>كَيْفَ كَانَ التَّسَوُّقُ فِي المَاضِي؟</a:t>
@@ -24980,6 +25164,7 @@
                   <a:srgbClr val="1B3B6F"/>
                 </a:solidFill>
                 <a:latin typeface="Amiri" pitchFamily="2" charset="-78"/>
+                <a:ea typeface="Amiri" pitchFamily="2" charset="-78"/>
                 <a:cs typeface="Amiri" pitchFamily="2" charset="-78"/>
               </a:rPr>
               <a:t>سَأَسْكُنُ فِي قَرْيَةٍ قُرْبَ البَحْرِ، لِأَنَّ الهَوَاءَ أَنْظَفُ وَالحَيَاةَ أَهْدَأُ مِنَ المَدِينَةِ.</a:t>
@@ -25056,6 +25241,7 @@
                   <a:srgbClr val="1B3B6F"/>
                 </a:solidFill>
                 <a:latin typeface="Amiri" pitchFamily="2" charset="-78"/>
+                <a:ea typeface="Amiri" pitchFamily="2" charset="-78"/>
                 <a:cs typeface="Amiri" pitchFamily="2" charset="-78"/>
               </a:rPr>
               <a:t>أَيْنَ تُحِبُّ أَنْ تَسْكُنَ فِي المُسْتَقْبَلِ؟</a:t>
@@ -25265,6 +25451,7 @@
                   <a:srgbClr val="D4AF37"/>
                 </a:solidFill>
                 <a:latin typeface="Amiri" pitchFamily="2" charset="-78"/>
+                <a:ea typeface="Amiri" pitchFamily="2" charset="-78"/>
                 <a:cs typeface="Amiri" pitchFamily="2" charset="-78"/>
               </a:rPr>
               <a:t>م</a:t>
@@ -25585,6 +25772,7 @@
                   <a:srgbClr val="8A6D1E"/>
                 </a:solidFill>
                 <a:latin typeface="Amiri" pitchFamily="2" charset="-78"/>
+                <a:ea typeface="Amiri" pitchFamily="2" charset="-78"/>
                 <a:cs typeface="Amiri" pitchFamily="2" charset="-78"/>
               </a:rPr>
               <a:t>نَمُوذَجُ الإِجَابَةِ</a:t>
@@ -25827,6 +26015,7 @@
                   <a:srgbClr val="1B3B6F"/>
                 </a:solidFill>
                 <a:latin typeface="Amiri" pitchFamily="2" charset="-78"/>
+                <a:ea typeface="Amiri" pitchFamily="2" charset="-78"/>
                 <a:cs typeface="Amiri" pitchFamily="2" charset="-78"/>
               </a:rPr>
               <a:t>أَرَى أَنَّ المَسْؤُولِيَّةَ مُشْتَرَكَةٌ؛ فَيَجِبُ عَلَى الحُكُومَاتِ أَنْ تَسُنَّ القَوَانِينَ، وَعَلَى كُلِّ فَرْدٍ أَنْ يُغَيِّرَ عَادَاتِهِ.</a:t>
@@ -25903,6 +26092,7 @@
                   <a:srgbClr val="1B3B6F"/>
                 </a:solidFill>
                 <a:latin typeface="Amiri" pitchFamily="2" charset="-78"/>
+                <a:ea typeface="Amiri" pitchFamily="2" charset="-78"/>
                 <a:cs typeface="Amiri" pitchFamily="2" charset="-78"/>
               </a:rPr>
               <a:t>مَنِ المَسْؤُولُ عَنْ حِمَايَةِ البِيئَةِ؟</a:t>
@@ -26006,6 +26196,7 @@
                   <a:srgbClr val="1B3B6F"/>
                 </a:solidFill>
                 <a:latin typeface="Amiri" pitchFamily="2" charset="-78"/>
+                <a:ea typeface="Amiri" pitchFamily="2" charset="-78"/>
                 <a:cs typeface="Amiri" pitchFamily="2" charset="-78"/>
               </a:rPr>
               <a:t>صَحِيحٌ أَنَّ الطَّائِرَاتِ تُلَوِّثُ كَثِيرًا، غَيْرَ أَنَّ السَّفَرَ يُقَرِّبُ الشُّعُوبَ؛ لِذٰلِكَ أُفَضِّلُ أَنْ نُسَافِرَ أَقَلَّ، وَلِمُدَّةٍ أَطْوَلَ، وَبِالقِطَارِ حِينَ يُمْكِنُ.</a:t>
@@ -26082,6 +26273,7 @@
                   <a:srgbClr val="1B3B6F"/>
                 </a:solidFill>
                 <a:latin typeface="Amiri" pitchFamily="2" charset="-78"/>
+                <a:ea typeface="Amiri" pitchFamily="2" charset="-78"/>
                 <a:cs typeface="Amiri" pitchFamily="2" charset="-78"/>
               </a:rPr>
               <a:t>هَلْ يَجِبُ أَنْ نُسَافِرَ أَقَلَّ بِالطَّائِرَةِ؟</a:t>
@@ -26185,6 +26377,7 @@
                   <a:srgbClr val="1B3B6F"/>
                 </a:solidFill>
                 <a:latin typeface="Amiri" pitchFamily="2" charset="-78"/>
+                <a:ea typeface="Amiri" pitchFamily="2" charset="-78"/>
                 <a:cs typeface="Amiri" pitchFamily="2" charset="-78"/>
               </a:rPr>
               <a:t>مِنْ نَاحِيَةٍ، أَتَكَلَّمُ مَعَ جَدَّتِي فِي مِصْرَ كُلَّ يَوْمٍ، وَمِنْ نَاحِيَةٍ أُخْرَى، نَجْلِسُ أَحْيَانًا فِي الغُرْفَةِ نَفْسِهَا وَكُلٌّ مِنَّا يَنْظُرُ إِلَى شَاشَتِهِ.</a:t>
@@ -26261,6 +26454,7 @@
                   <a:srgbClr val="1B3B6F"/>
                 </a:solidFill>
                 <a:latin typeface="Amiri" pitchFamily="2" charset="-78"/>
+                <a:ea typeface="Amiri" pitchFamily="2" charset="-78"/>
                 <a:cs typeface="Amiri" pitchFamily="2" charset="-78"/>
               </a:rPr>
               <a:t>هَلْ جَعَلَتْنَا التِّكْنُولُوجْيَا أَقْرَبَ أَمْ أَبْعَدَ؟</a:t>
@@ -26470,6 +26664,7 @@
                   <a:srgbClr val="D4AF37"/>
                 </a:solidFill>
                 <a:latin typeface="Amiri" pitchFamily="2" charset="-78"/>
+                <a:ea typeface="Amiri" pitchFamily="2" charset="-78"/>
                 <a:cs typeface="Amiri" pitchFamily="2" charset="-78"/>
               </a:rPr>
               <a:t>م</a:t>
@@ -26790,6 +26985,7 @@
                   <a:srgbClr val="8A6D1E"/>
                 </a:solidFill>
                 <a:latin typeface="Amiri" pitchFamily="2" charset="-78"/>
+                <a:ea typeface="Amiri" pitchFamily="2" charset="-78"/>
                 <a:cs typeface="Amiri" pitchFamily="2" charset="-78"/>
               </a:rPr>
               <a:t>نَمُوذَجُ الإِجَابَةِ</a:t>
@@ -27032,6 +27228,7 @@
                   <a:srgbClr val="1B3B6F"/>
                 </a:solidFill>
                 <a:latin typeface="Amiri" pitchFamily="2" charset="-78"/>
+                <a:ea typeface="Amiri" pitchFamily="2" charset="-78"/>
                 <a:cs typeface="Amiri" pitchFamily="2" charset="-78"/>
               </a:rPr>
               <a:t>سَتَكُونُ أَكْثَرَ خُضْرَةً، وَسَتُبْنَى البُيُوتُ مِنْ مَوَادَّ مُعَادٍ تَدْوِيرُهَا، إِذَا بَدَأْنَا الآنَ.</a:t>
@@ -27108,6 +27305,7 @@
                   <a:srgbClr val="1B3B6F"/>
                 </a:solidFill>
                 <a:latin typeface="Amiri" pitchFamily="2" charset="-78"/>
+                <a:ea typeface="Amiri" pitchFamily="2" charset="-78"/>
                 <a:cs typeface="Amiri" pitchFamily="2" charset="-78"/>
               </a:rPr>
               <a:t>كَيْفَ سَتَكُونُ المُدُنُ بَعْدَ خَمْسِينَ سَنَةً؟</a:t>
@@ -27211,6 +27409,7 @@
                   <a:srgbClr val="1B3B6F"/>
                 </a:solidFill>
                 <a:latin typeface="Amiri" pitchFamily="2" charset="-78"/>
+                <a:ea typeface="Amiri" pitchFamily="2" charset="-78"/>
                 <a:cs typeface="Amiri" pitchFamily="2" charset="-78"/>
               </a:rPr>
               <a:t>لَوْ كُنْتُ رَئِيسَ البَلَدِيَّةِ، لَجَعَلْتُ الحَافِلَاتِ مَجَّانِيَّةً لِلطُّلَّابِ، وَلَحَوَّلْتُ مَوْقِفَ السَّيَّارَاتِ الكَبِيرَ إِلَى حَدِيقَةٍ.</a:t>
@@ -27287,6 +27486,7 @@
                   <a:srgbClr val="1B3B6F"/>
                 </a:solidFill>
                 <a:latin typeface="Amiri" pitchFamily="2" charset="-78"/>
+                <a:ea typeface="Amiri" pitchFamily="2" charset="-78"/>
                 <a:cs typeface="Amiri" pitchFamily="2" charset="-78"/>
               </a:rPr>
               <a:t>لَوْ كُنْتَ رَئِيسَ بَلَدِيَّةِ مَدِينَتِكَ، مَاذَا تُغَيِّرُ؟</a:t>
@@ -27496,6 +27696,7 @@
                   <a:srgbClr val="D4AF37"/>
                 </a:solidFill>
                 <a:latin typeface="Amiri" pitchFamily="2" charset="-78"/>
+                <a:ea typeface="Amiri" pitchFamily="2" charset="-78"/>
                 <a:cs typeface="Amiri" pitchFamily="2" charset="-78"/>
               </a:rPr>
               <a:t>م</a:t>
@@ -27816,6 +28017,7 @@
                   <a:srgbClr val="8A6D1E"/>
                 </a:solidFill>
                 <a:latin typeface="Amiri" pitchFamily="2" charset="-78"/>
+                <a:ea typeface="Amiri" pitchFamily="2" charset="-78"/>
                 <a:cs typeface="Amiri" pitchFamily="2" charset="-78"/>
               </a:rPr>
               <a:t>قَيِّمْ عَمَلَكَ</a:t>
@@ -29060,6 +29262,7 @@
                   <a:srgbClr val="FFFFFF"/>
                 </a:solidFill>
                 <a:latin typeface="Amiri" pitchFamily="2" charset="-78"/>
+                <a:ea typeface="Amiri" pitchFamily="2" charset="-78"/>
                 <a:cs typeface="Amiri" pitchFamily="2" charset="-78"/>
               </a:rPr>
               <a:t>أَحْسَنْتُمْ! إِلَى اللِّقَاءِ</a:t>
@@ -29212,6 +29415,7 @@
                   <a:srgbClr val="D4AF37"/>
                 </a:solidFill>
                 <a:latin typeface="Amiri" pitchFamily="2" charset="-78"/>
+                <a:ea typeface="Amiri" pitchFamily="2" charset="-78"/>
                 <a:cs typeface="Amiri" pitchFamily="2" charset="-78"/>
               </a:rPr>
               <a:t>وَرْشَةُ الكِتَابَةِ</a:t>
@@ -29345,6 +29549,7 @@
                   <a:srgbClr val="D4AF37"/>
                 </a:solidFill>
                 <a:latin typeface="Amiri" pitchFamily="2" charset="-78"/>
+                <a:ea typeface="Amiri" pitchFamily="2" charset="-78"/>
                 <a:cs typeface="Amiri" pitchFamily="2" charset="-78"/>
               </a:rPr>
               <a:t>م</a:t>
@@ -29665,6 +29870,7 @@
                   <a:srgbClr val="8A6D1E"/>
                 </a:solidFill>
                 <a:latin typeface="Amiri" pitchFamily="2" charset="-78"/>
+                <a:ea typeface="Amiri" pitchFamily="2" charset="-78"/>
                 <a:cs typeface="Amiri" pitchFamily="2" charset="-78"/>
               </a:rPr>
               <a:t>خَرِيطَةُ الوَرْشَةِ</a:t>
@@ -29979,6 +30185,7 @@
                   <a:srgbClr val="1B3B6F"/>
                 </a:solidFill>
                 <a:latin typeface="Amiri" pitchFamily="2" charset="-78"/>
+                <a:ea typeface="Amiri" pitchFamily="2" charset="-78"/>
                 <a:cs typeface="Amiri" pitchFamily="2" charset="-78"/>
               </a:rPr>
               <a:t>كَيْفَ</a:t>
@@ -30255,6 +30462,7 @@
                   <a:srgbClr val="1E6B52"/>
                 </a:solidFill>
                 <a:latin typeface="Amiri" pitchFamily="2" charset="-78"/>
+                <a:ea typeface="Amiri" pitchFamily="2" charset="-78"/>
                 <a:cs typeface="Amiri" pitchFamily="2" charset="-78"/>
               </a:rPr>
               <a:t>تَمْثِيلُ الدَّوْرِ</a:t>
@@ -30531,6 +30739,7 @@
                   <a:srgbClr val="8A6D1E"/>
                 </a:solidFill>
                 <a:latin typeface="Amiri" pitchFamily="2" charset="-78"/>
+                <a:ea typeface="Amiri" pitchFamily="2" charset="-78"/>
                 <a:cs typeface="Amiri" pitchFamily="2" charset="-78"/>
               </a:rPr>
               <a:t>النَّمُوذَجُ</a:t>
@@ -30807,6 +31016,7 @@
                   <a:srgbClr val="1E6B52"/>
                 </a:solidFill>
                 <a:latin typeface="Amiri" pitchFamily="2" charset="-78"/>
+                <a:ea typeface="Amiri" pitchFamily="2" charset="-78"/>
                 <a:cs typeface="Amiri" pitchFamily="2" charset="-78"/>
               </a:rPr>
               <a:t>المُحَادَثَةُ</a:t>
@@ -31083,6 +31293,7 @@
                   <a:srgbClr val="8A6D1E"/>
                 </a:solidFill>
                 <a:latin typeface="Amiri" pitchFamily="2" charset="-78"/>
+                <a:ea typeface="Amiri" pitchFamily="2" charset="-78"/>
                 <a:cs typeface="Amiri" pitchFamily="2" charset="-78"/>
               </a:rPr>
               <a:t>قَيِّمْ</a:t>
@@ -31326,6 +31537,7 @@
                   <a:srgbClr val="D4AF37"/>
                 </a:solidFill>
                 <a:latin typeface="Amiri" pitchFamily="2" charset="-78"/>
+                <a:ea typeface="Amiri" pitchFamily="2" charset="-78"/>
                 <a:cs typeface="Amiri" pitchFamily="2" charset="-78"/>
               </a:rPr>
               <a:t>م</a:t>
@@ -31646,6 +31858,7 @@
                   <a:srgbClr val="8A6D1E"/>
                 </a:solidFill>
                 <a:latin typeface="Amiri" pitchFamily="2" charset="-78"/>
+                <a:ea typeface="Amiri" pitchFamily="2" charset="-78"/>
                 <a:cs typeface="Amiri" pitchFamily="2" charset="-78"/>
               </a:rPr>
               <a:t>امْتِحَانُ التَّحَدُّثِ</a:t>
@@ -32270,6 +32483,7 @@
                   <a:srgbClr val="1B3B6F"/>
                 </a:solidFill>
                 <a:latin typeface="Amiri" pitchFamily="2" charset="-78"/>
+                <a:ea typeface="Amiri" pitchFamily="2" charset="-78"/>
                 <a:cs typeface="Amiri" pitchFamily="2" charset="-78"/>
               </a:rPr>
               <a:t>عَفْوًا، هَلْ يُمْكِنُ أَنْ تُعِيدَ السُّؤَالَ؟</a:t>
@@ -32369,6 +32583,7 @@
                   <a:srgbClr val="1B3B6F"/>
                 </a:solidFill>
                 <a:latin typeface="Amiri" pitchFamily="2" charset="-78"/>
+                <a:ea typeface="Amiri" pitchFamily="2" charset="-78"/>
                 <a:cs typeface="Amiri" pitchFamily="2" charset="-78"/>
               </a:rPr>
               <a:t>لَحْظَةً، دَعْنِي أُفَكِّرُ …</a:t>
@@ -32468,6 +32683,7 @@
                   <a:srgbClr val="1B3B6F"/>
                 </a:solidFill>
                 <a:latin typeface="Amiri" pitchFamily="2" charset="-78"/>
+                <a:ea typeface="Amiri" pitchFamily="2" charset="-78"/>
                 <a:cs typeface="Amiri" pitchFamily="2" charset="-78"/>
               </a:rPr>
               <a:t>أَقْصِدُ …</a:t>
@@ -32639,6 +32855,7 @@
                   <a:srgbClr val="D4AF37"/>
                 </a:solidFill>
                 <a:latin typeface="Amiri" pitchFamily="2" charset="-78"/>
+                <a:ea typeface="Amiri" pitchFamily="2" charset="-78"/>
                 <a:cs typeface="Amiri" pitchFamily="2" charset="-78"/>
               </a:rPr>
               <a:t>م</a:t>
@@ -32959,6 +33176,7 @@
                   <a:srgbClr val="8A6D1E"/>
                 </a:solidFill>
                 <a:latin typeface="Amiri" pitchFamily="2" charset="-78"/>
+                <a:ea typeface="Amiri" pitchFamily="2" charset="-78"/>
                 <a:cs typeface="Amiri" pitchFamily="2" charset="-78"/>
               </a:rPr>
               <a:t>المِحْوَرُ الثَّالِثُ فِي اثْنَتَيْ عَشْرَةَ بِنْيَةً</a:t>
@@ -33262,6 +33480,7 @@
                   <a:srgbClr val="1B3B6F"/>
                 </a:solidFill>
                 <a:latin typeface="Amiri" pitchFamily="2" charset="-78"/>
+                <a:ea typeface="Amiri" pitchFamily="2" charset="-78"/>
                 <a:cs typeface="Amiri" pitchFamily="2" charset="-78"/>
               </a:rPr>
               <a:t>يَقَعُ فِي شَمَالِ …</a:t>
@@ -33419,6 +33638,7 @@
                   <a:srgbClr val="1B3B6F"/>
                 </a:solidFill>
                 <a:latin typeface="Amiri" pitchFamily="2" charset="-78"/>
+                <a:ea typeface="Amiri" pitchFamily="2" charset="-78"/>
                 <a:cs typeface="Amiri" pitchFamily="2" charset="-78"/>
               </a:rPr>
               <a:t>تَقَعُ</a:t>
@@ -33522,6 +33742,7 @@
                   <a:srgbClr val="1B3B6F"/>
                 </a:solidFill>
                 <a:latin typeface="Amiri" pitchFamily="2" charset="-78"/>
+                <a:ea typeface="Amiri" pitchFamily="2" charset="-78"/>
                 <a:cs typeface="Amiri" pitchFamily="2" charset="-78"/>
               </a:rPr>
               <a:t>جَنُوبِ · شَرْقِ · غَرْبِ</a:t>
@@ -33787,6 +34008,7 @@
                   <a:srgbClr val="1B3B6F"/>
                 </a:solidFill>
                 <a:latin typeface="Amiri" pitchFamily="2" charset="-78"/>
+                <a:ea typeface="Amiri" pitchFamily="2" charset="-78"/>
                 <a:cs typeface="Amiri" pitchFamily="2" charset="-78"/>
               </a:rPr>
               <a:t>جِبَالٌ عَالِيَةٌ</a:t>
@@ -33944,6 +34166,7 @@
                   <a:srgbClr val="1B3B6F"/>
                 </a:solidFill>
                 <a:latin typeface="Amiri" pitchFamily="2" charset="-78"/>
+                <a:ea typeface="Amiri" pitchFamily="2" charset="-78"/>
                 <a:cs typeface="Amiri" pitchFamily="2" charset="-78"/>
               </a:rPr>
               <a:t>نَهْرٌ</a:t>
@@ -34047,6 +34270,7 @@
                   <a:srgbClr val="1B3B6F"/>
                 </a:solidFill>
                 <a:latin typeface="Amiri" pitchFamily="2" charset="-78"/>
+                <a:ea typeface="Amiri" pitchFamily="2" charset="-78"/>
                 <a:cs typeface="Amiri" pitchFamily="2" charset="-78"/>
               </a:rPr>
               <a:t>غَابَاتٌ كَثِيفَةٌ</a:t>
@@ -34312,6 +34536,7 @@
                   <a:srgbClr val="1B3B6F"/>
                 </a:solidFill>
                 <a:latin typeface="Amiri" pitchFamily="2" charset="-78"/>
+                <a:ea typeface="Amiri" pitchFamily="2" charset="-78"/>
                 <a:cs typeface="Amiri" pitchFamily="2" charset="-78"/>
               </a:rPr>
               <a:t>الجَوُّ مُشْمِسٌ</a:t>
@@ -34469,6 +34694,7 @@
                   <a:srgbClr val="1B3B6F"/>
                 </a:solidFill>
                 <a:latin typeface="Amiri" pitchFamily="2" charset="-78"/>
+                <a:ea typeface="Amiri" pitchFamily="2" charset="-78"/>
                 <a:cs typeface="Amiri" pitchFamily="2" charset="-78"/>
               </a:rPr>
               <a:t>أَبْرَدُ مِنْ</a:t>
@@ -34572,6 +34798,7 @@
                   <a:srgbClr val="1B3B6F"/>
                 </a:solidFill>
                 <a:latin typeface="Amiri" pitchFamily="2" charset="-78"/>
+                <a:ea typeface="Amiri" pitchFamily="2" charset="-78"/>
                 <a:cs typeface="Amiri" pitchFamily="2" charset="-78"/>
               </a:rPr>
               <a:t>تُمْطِرُ</a:t>
@@ -34837,6 +35064,7 @@
                   <a:srgbClr val="1B3B6F"/>
                 </a:solidFill>
                 <a:latin typeface="Amiri" pitchFamily="2" charset="-78"/>
+                <a:ea typeface="Amiri" pitchFamily="2" charset="-78"/>
                 <a:cs typeface="Amiri" pitchFamily="2" charset="-78"/>
               </a:rPr>
               <a:t>التَّلَوُّثُ</a:t>
@@ -34994,6 +35222,7 @@
                   <a:srgbClr val="1B3B6F"/>
                 </a:solidFill>
                 <a:latin typeface="Amiri" pitchFamily="2" charset="-78"/>
+                <a:ea typeface="Amiri" pitchFamily="2" charset="-78"/>
                 <a:cs typeface="Amiri" pitchFamily="2" charset="-78"/>
               </a:rPr>
               <a:t>مِمَّا يُؤَدِّي إِلَى</a:t>
@@ -35097,6 +35326,7 @@
                   <a:srgbClr val="1B3B6F"/>
                 </a:solidFill>
                 <a:latin typeface="Amiri" pitchFamily="2" charset="-78"/>
+                <a:ea typeface="Amiri" pitchFamily="2" charset="-78"/>
                 <a:cs typeface="Amiri" pitchFamily="2" charset="-78"/>
               </a:rPr>
               <a:t>بِسَبَبِ</a:t>
@@ -35362,6 +35592,7 @@
                   <a:srgbClr val="1B3B6F"/>
                 </a:solidFill>
                 <a:latin typeface="Amiri" pitchFamily="2" charset="-78"/>
+                <a:ea typeface="Amiri" pitchFamily="2" charset="-78"/>
                 <a:cs typeface="Amiri" pitchFamily="2" charset="-78"/>
               </a:rPr>
               <a:t>يَجِبُ عَلَيْنَا أَنْ …</a:t>
@@ -35519,6 +35750,7 @@
                   <a:srgbClr val="1B3B6F"/>
                 </a:solidFill>
                 <a:latin typeface="Amiri" pitchFamily="2" charset="-78"/>
+                <a:ea typeface="Amiri" pitchFamily="2" charset="-78"/>
                 <a:cs typeface="Amiri" pitchFamily="2" charset="-78"/>
               </a:rPr>
               <a:t>نُوَفِّرَ المَاءَ</a:t>
@@ -35622,6 +35854,7 @@
                   <a:srgbClr val="1B3B6F"/>
                 </a:solidFill>
                 <a:latin typeface="Amiri" pitchFamily="2" charset="-78"/>
+                <a:ea typeface="Amiri" pitchFamily="2" charset="-78"/>
                 <a:cs typeface="Amiri" pitchFamily="2" charset="-78"/>
               </a:rPr>
               <a:t>إِعَادَةُ التَّدْوِيرِ</a:t>
@@ -35887,6 +36120,7 @@
                   <a:srgbClr val="1B3B6F"/>
                 </a:solidFill>
                 <a:latin typeface="Amiri" pitchFamily="2" charset="-78"/>
+                <a:ea typeface="Amiri" pitchFamily="2" charset="-78"/>
                 <a:cs typeface="Amiri" pitchFamily="2" charset="-78"/>
               </a:rPr>
               <a:t>أَتَوَاصَلُ عَبْرَ …</a:t>
@@ -36044,6 +36278,7 @@
                   <a:srgbClr val="1B3B6F"/>
                 </a:solidFill>
                 <a:latin typeface="Amiri" pitchFamily="2" charset="-78"/>
+                <a:ea typeface="Amiri" pitchFamily="2" charset="-78"/>
                 <a:cs typeface="Amiri" pitchFamily="2" charset="-78"/>
               </a:rPr>
               <a:t>وَسَائِلُ التَّوَاصُلِ</a:t>
@@ -36147,6 +36382,7 @@
                   <a:srgbClr val="1B3B6F"/>
                 </a:solidFill>
                 <a:latin typeface="Amiri" pitchFamily="2" charset="-78"/>
+                <a:ea typeface="Amiri" pitchFamily="2" charset="-78"/>
                 <a:cs typeface="Amiri" pitchFamily="2" charset="-78"/>
               </a:rPr>
               <a:t>تَطْبِيقٌ</a:t>
@@ -36280,6 +36516,7 @@
                   <a:srgbClr val="D4AF37"/>
                 </a:solidFill>
                 <a:latin typeface="Amiri" pitchFamily="2" charset="-78"/>
+                <a:ea typeface="Amiri" pitchFamily="2" charset="-78"/>
                 <a:cs typeface="Amiri" pitchFamily="2" charset="-78"/>
               </a:rPr>
               <a:t>م</a:t>
@@ -36600,6 +36837,7 @@
                   <a:srgbClr val="8A6D1E"/>
                 </a:solidFill>
                 <a:latin typeface="Amiri" pitchFamily="2" charset="-78"/>
+                <a:ea typeface="Amiri" pitchFamily="2" charset="-78"/>
                 <a:cs typeface="Amiri" pitchFamily="2" charset="-78"/>
               </a:rPr>
               <a:t>السَّبَبُ وَالنَّتِيجَةُ وَالحَلُّ</a:t>
@@ -36903,6 +37141,7 @@
                   <a:srgbClr val="1B3B6F"/>
                 </a:solidFill>
                 <a:latin typeface="Amiri" pitchFamily="2" charset="-78"/>
+                <a:ea typeface="Amiri" pitchFamily="2" charset="-78"/>
                 <a:cs typeface="Amiri" pitchFamily="2" charset="-78"/>
               </a:rPr>
               <a:t>أُرِيدُ أَنْ أَحْجِزَ …</a:t>
@@ -37060,6 +37299,7 @@
                   <a:srgbClr val="1B3B6F"/>
                 </a:solidFill>
                 <a:latin typeface="Amiri" pitchFamily="2" charset="-78"/>
+                <a:ea typeface="Amiri" pitchFamily="2" charset="-78"/>
                 <a:cs typeface="Amiri" pitchFamily="2" charset="-78"/>
               </a:rPr>
               <a:t>لِثَلَاثِ لَيَالٍ</a:t>
@@ -37163,6 +37403,7 @@
                   <a:srgbClr val="1B3B6F"/>
                 </a:solidFill>
                 <a:latin typeface="Amiri" pitchFamily="2" charset="-78"/>
+                <a:ea typeface="Amiri" pitchFamily="2" charset="-78"/>
                 <a:cs typeface="Amiri" pitchFamily="2" charset="-78"/>
               </a:rPr>
               <a:t>غُرْفَةٌ لِشَخْصٍ وَاحِدٍ</a:t>
@@ -37428,6 +37669,7 @@
                   <a:srgbClr val="1B3B6F"/>
                 </a:solidFill>
                 <a:latin typeface="Amiri" pitchFamily="2" charset="-78"/>
+                <a:ea typeface="Amiri" pitchFamily="2" charset="-78"/>
                 <a:cs typeface="Amiri" pitchFamily="2" charset="-78"/>
               </a:rPr>
               <a:t>يُوجَدُ · تُوجَدُ</a:t>
@@ -37585,6 +37827,7 @@
                   <a:srgbClr val="1B3B6F"/>
                 </a:solidFill>
                 <a:latin typeface="Amiri" pitchFamily="2" charset="-78"/>
+                <a:ea typeface="Amiri" pitchFamily="2" charset="-78"/>
                 <a:cs typeface="Amiri" pitchFamily="2" charset="-78"/>
               </a:rPr>
               <a:t>قُرْبَ</a:t>
@@ -37688,6 +37931,7 @@
                   <a:srgbClr val="1B3B6F"/>
                 </a:solidFill>
                 <a:latin typeface="Amiri" pitchFamily="2" charset="-78"/>
+                <a:ea typeface="Amiri" pitchFamily="2" charset="-78"/>
                 <a:cs typeface="Amiri" pitchFamily="2" charset="-78"/>
               </a:rPr>
               <a:t>مُقَابِلَ</a:t>
@@ -37953,6 +38197,7 @@
                   <a:srgbClr val="1B3B6F"/>
                 </a:solidFill>
                 <a:latin typeface="Amiri" pitchFamily="2" charset="-78"/>
+                <a:ea typeface="Amiri" pitchFamily="2" charset="-78"/>
                 <a:cs typeface="Amiri" pitchFamily="2" charset="-78"/>
               </a:rPr>
               <a:t>كَمْ ثَمَنُ …؟</a:t>
@@ -38110,6 +38355,7 @@
                   <a:srgbClr val="1B3B6F"/>
                 </a:solidFill>
                 <a:latin typeface="Amiri" pitchFamily="2" charset="-78"/>
+                <a:ea typeface="Amiri" pitchFamily="2" charset="-78"/>
                 <a:cs typeface="Amiri" pitchFamily="2" charset="-78"/>
               </a:rPr>
               <a:t>تَخْفِيضٌ</a:t>
@@ -38213,6 +38459,7 @@
                   <a:srgbClr val="1B3B6F"/>
                 </a:solidFill>
                 <a:latin typeface="Amiri" pitchFamily="2" charset="-78"/>
+                <a:ea typeface="Amiri" pitchFamily="2" charset="-78"/>
                 <a:cs typeface="Amiri" pitchFamily="2" charset="-78"/>
               </a:rPr>
               <a:t>أَرْخَصُ مِنْ</a:t>
@@ -38478,6 +38725,7 @@
                   <a:srgbClr val="1B3B6F"/>
                 </a:solidFill>
                 <a:latin typeface="Amiri" pitchFamily="2" charset="-78"/>
+                <a:ea typeface="Amiri" pitchFamily="2" charset="-78"/>
                 <a:cs typeface="Amiri" pitchFamily="2" charset="-78"/>
               </a:rPr>
               <a:t>طُولُهُ … · مَصْنُوعٌ مِنْ …</a:t>
@@ -38635,6 +38883,7 @@
                   <a:srgbClr val="1B3B6F"/>
                 </a:solidFill>
                 <a:latin typeface="Amiri" pitchFamily="2" charset="-78"/>
+                <a:ea typeface="Amiri" pitchFamily="2" charset="-78"/>
                 <a:cs typeface="Amiri" pitchFamily="2" charset="-78"/>
               </a:rPr>
               <a:t>مَصْنُوعَةٌ مِنْ</a:t>
@@ -38738,6 +38987,7 @@
                   <a:srgbClr val="1B3B6F"/>
                 </a:solidFill>
                 <a:latin typeface="Amiri" pitchFamily="2" charset="-78"/>
+                <a:ea typeface="Amiri" pitchFamily="2" charset="-78"/>
                 <a:cs typeface="Amiri" pitchFamily="2" charset="-78"/>
               </a:rPr>
               <a:t>بْلَاسْتِيكٌ · زُجَاجٌ</a:t>
@@ -39003,6 +39253,7 @@
                   <a:srgbClr val="1B3B6F"/>
                 </a:solidFill>
                 <a:latin typeface="Amiri" pitchFamily="2" charset="-78"/>
+                <a:ea typeface="Amiri" pitchFamily="2" charset="-78"/>
                 <a:cs typeface="Amiri" pitchFamily="2" charset="-78"/>
               </a:rPr>
               <a:t>تُرْمَى · يُلَوَّثُ</a:t>
@@ -39160,6 +39411,7 @@
                   <a:srgbClr val="1B3B6F"/>
                 </a:solidFill>
                 <a:latin typeface="Amiri" pitchFamily="2" charset="-78"/>
+                <a:ea typeface="Amiri" pitchFamily="2" charset="-78"/>
                 <a:cs typeface="Amiri" pitchFamily="2" charset="-78"/>
               </a:rPr>
               <a:t>يُعَادُ تَدْوِيرُهُ</a:t>
@@ -39263,6 +39515,7 @@
                   <a:srgbClr val="1B3B6F"/>
                 </a:solidFill>
                 <a:latin typeface="Amiri" pitchFamily="2" charset="-78"/>
+                <a:ea typeface="Amiri" pitchFamily="2" charset="-78"/>
                 <a:cs typeface="Amiri" pitchFamily="2" charset="-78"/>
               </a:rPr>
               <a:t>بُنِيَ</a:t>
@@ -39528,6 +39781,7 @@
                   <a:srgbClr val="1B3B6F"/>
                 </a:solidFill>
                 <a:latin typeface="Amiri" pitchFamily="2" charset="-78"/>
+                <a:ea typeface="Amiri" pitchFamily="2" charset="-78"/>
                 <a:cs typeface="Amiri" pitchFamily="2" charset="-78"/>
               </a:rPr>
               <a:t>صَحِيحٌ أَنَّ … غَيْرَ أَنَّ …</a:t>
@@ -39685,6 +39939,7 @@
                   <a:srgbClr val="1B3B6F"/>
                 </a:solidFill>
                 <a:latin typeface="Amiri" pitchFamily="2" charset="-78"/>
+                <a:ea typeface="Amiri" pitchFamily="2" charset="-78"/>
                 <a:cs typeface="Amiri" pitchFamily="2" charset="-78"/>
               </a:rPr>
               <a:t>مِنْ نَاحِيَةٍ</a:t>
@@ -39788,6 +40043,7 @@
                   <a:srgbClr val="1B3B6F"/>
                 </a:solidFill>
                 <a:latin typeface="Amiri" pitchFamily="2" charset="-78"/>
+                <a:ea typeface="Amiri" pitchFamily="2" charset="-78"/>
                 <a:cs typeface="Amiri" pitchFamily="2" charset="-78"/>
               </a:rPr>
               <a:t>لَوْ كُنْتُ رَئِيسَ البَلَدِيَّةِ لَمَنَعْتُ</a:t>
@@ -39921,6 +40177,7 @@
                   <a:srgbClr val="D4AF37"/>
                 </a:solidFill>
                 <a:latin typeface="Amiri" pitchFamily="2" charset="-78"/>
+                <a:ea typeface="Amiri" pitchFamily="2" charset="-78"/>
                 <a:cs typeface="Amiri" pitchFamily="2" charset="-78"/>
               </a:rPr>
               <a:t>م</a:t>
@@ -40241,6 +40498,7 @@
                   <a:srgbClr val="8A6D1E"/>
                 </a:solidFill>
                 <a:latin typeface="Amiri" pitchFamily="2" charset="-78"/>
+                <a:ea typeface="Amiri" pitchFamily="2" charset="-78"/>
                 <a:cs typeface="Amiri" pitchFamily="2" charset="-78"/>
               </a:rPr>
               <a:t>فِي الغُرَفِ</a:t>
@@ -41417,6 +41675,7 @@
                   <a:srgbClr val="1B3B6F"/>
                 </a:solidFill>
                 <a:latin typeface="Amiri" pitchFamily="2" charset="-78"/>
+                <a:ea typeface="Amiri" pitchFamily="2" charset="-78"/>
                 <a:cs typeface="Amiri" pitchFamily="2" charset="-78"/>
               </a:rPr>
               <a:t>دَوْرُكَ!</a:t>
@@ -41493,6 +41752,7 @@
                   <a:srgbClr val="1B3B6F"/>
                 </a:solidFill>
                 <a:latin typeface="Amiri" pitchFamily="2" charset="-78"/>
+                <a:ea typeface="Amiri" pitchFamily="2" charset="-78"/>
                 <a:cs typeface="Amiri" pitchFamily="2" charset="-78"/>
               </a:rPr>
               <a:t>أَحْسَنْتَ! / أَحْسَنْتِ!</a:t>
@@ -41569,6 +41829,7 @@
                   <a:srgbClr val="1B3B6F"/>
                 </a:solidFill>
                 <a:latin typeface="Amiri" pitchFamily="2" charset="-78"/>
+                <a:ea typeface="Amiri" pitchFamily="2" charset="-78"/>
                 <a:cs typeface="Amiri" pitchFamily="2" charset="-78"/>
               </a:rPr>
               <a:t>تَكَلَّمْ أَكْثَرَ، مِنْ فَضْلِكَ</a:t>
@@ -41645,6 +41906,7 @@
                   <a:srgbClr val="1B3B6F"/>
                 </a:solidFill>
                 <a:latin typeface="Amiri" pitchFamily="2" charset="-78"/>
+                <a:ea typeface="Amiri" pitchFamily="2" charset="-78"/>
                 <a:cs typeface="Amiri" pitchFamily="2" charset="-78"/>
               </a:rPr>
               <a:t>لِمَاذَا؟</a:t>
@@ -41816,6 +42078,7 @@
                   <a:srgbClr val="D4AF37"/>
                 </a:solidFill>
                 <a:latin typeface="Amiri" pitchFamily="2" charset="-78"/>
+                <a:ea typeface="Amiri" pitchFamily="2" charset="-78"/>
                 <a:cs typeface="Amiri" pitchFamily="2" charset="-78"/>
               </a:rPr>
               <a:t>م</a:t>
@@ -42136,6 +42399,7 @@
                   <a:srgbClr val="8A6D1E"/>
                 </a:solidFill>
                 <a:latin typeface="Amiri" pitchFamily="2" charset="-78"/>
+                <a:ea typeface="Amiri" pitchFamily="2" charset="-78"/>
                 <a:cs typeface="Amiri" pitchFamily="2" charset="-78"/>
               </a:rPr>
               <a:t>فِي مَكْتَبِ السِّيَاحَةِ</a:t>
@@ -42416,6 +42680,7 @@
                   <a:srgbClr val="1B3B6F"/>
                 </a:solidFill>
                 <a:latin typeface="Amiri" pitchFamily="2" charset="-78"/>
+                <a:ea typeface="Amiri" pitchFamily="2" charset="-78"/>
                 <a:cs typeface="Amiri" pitchFamily="2" charset="-78"/>
               </a:rPr>
               <a:t>أَيْنَ يَقَعُ …؟</a:t>
@@ -42492,6 +42757,7 @@
                   <a:srgbClr val="1B3B6F"/>
                 </a:solidFill>
                 <a:latin typeface="Amiri" pitchFamily="2" charset="-78"/>
+                <a:ea typeface="Amiri" pitchFamily="2" charset="-78"/>
                 <a:cs typeface="Amiri" pitchFamily="2" charset="-78"/>
               </a:rPr>
               <a:t>أَهْلًا! كَيْفَ أُسَاعِدُكَ؟</a:t>
@@ -42660,6 +42926,7 @@
                   <a:srgbClr val="1B3B6F"/>
                 </a:solidFill>
                 <a:latin typeface="Amiri" pitchFamily="2" charset="-78"/>
+                <a:ea typeface="Amiri" pitchFamily="2" charset="-78"/>
                 <a:cs typeface="Amiri" pitchFamily="2" charset="-78"/>
               </a:rPr>
               <a:t>مَتَى يَفْتَحُ …؟</a:t>
@@ -42736,6 +43003,7 @@
                   <a:srgbClr val="1B3B6F"/>
                 </a:solidFill>
                 <a:latin typeface="Amiri" pitchFamily="2" charset="-78"/>
+                <a:ea typeface="Amiri" pitchFamily="2" charset="-78"/>
                 <a:cs typeface="Amiri" pitchFamily="2" charset="-78"/>
               </a:rPr>
               <a:t>فِي وَسَطِ المَدِينَةِ، مُقَابِلَ البَلَدِيَّةِ.</a:t>
@@ -42904,6 +43172,7 @@
                   <a:srgbClr val="1B3B6F"/>
                 </a:solidFill>
                 <a:latin typeface="Amiri" pitchFamily="2" charset="-78"/>
+                <a:ea typeface="Amiri" pitchFamily="2" charset="-78"/>
                 <a:cs typeface="Amiri" pitchFamily="2" charset="-78"/>
               </a:rPr>
               <a:t>نَعَمْ، سَأَبْقَى …</a:t>
@@ -42980,6 +43249,7 @@
                   <a:srgbClr val="1B3B6F"/>
                 </a:solidFill>
                 <a:latin typeface="Amiri" pitchFamily="2" charset="-78"/>
+                <a:ea typeface="Amiri" pitchFamily="2" charset="-78"/>
                 <a:cs typeface="Amiri" pitchFamily="2" charset="-78"/>
               </a:rPr>
               <a:t>فِي التَّاسِعَةِ صَبَاحًا. هَلْ هٰذِهِ أَوَّلُ زِيَارَةٍ لَكَ؟</a:t>
@@ -43148,6 +43418,7 @@
                   <a:srgbClr val="1B3B6F"/>
                 </a:solidFill>
                 <a:latin typeface="Amiri" pitchFamily="2" charset="-78"/>
+                <a:ea typeface="Amiri" pitchFamily="2" charset="-78"/>
                 <a:cs typeface="Amiri" pitchFamily="2" charset="-78"/>
               </a:rPr>
               <a:t>كَيْفَ سَيَكُونُ الجَوُّ …؟</a:t>
@@ -43224,6 +43495,7 @@
                   <a:srgbClr val="1B3B6F"/>
                 </a:solidFill>
                 <a:latin typeface="Amiri" pitchFamily="2" charset="-78"/>
+                <a:ea typeface="Amiri" pitchFamily="2" charset="-78"/>
                 <a:cs typeface="Amiri" pitchFamily="2" charset="-78"/>
               </a:rPr>
               <a:t>مُمْتَازٌ!</a:t>
@@ -43392,6 +43664,7 @@
                   <a:srgbClr val="1B3B6F"/>
                 </a:solidFill>
                 <a:latin typeface="Amiri" pitchFamily="2" charset="-78"/>
+                <a:ea typeface="Amiri" pitchFamily="2" charset="-78"/>
                 <a:cs typeface="Amiri" pitchFamily="2" charset="-78"/>
               </a:rPr>
               <a:t>الجَوُّ … وَتُمْطِرُ …</a:t>
@@ -43468,6 +43741,7 @@
                   <a:srgbClr val="1B3B6F"/>
                 </a:solidFill>
                 <a:latin typeface="Amiri" pitchFamily="2" charset="-78"/>
+                <a:ea typeface="Amiri" pitchFamily="2" charset="-78"/>
                 <a:cs typeface="Amiri" pitchFamily="2" charset="-78"/>
               </a:rPr>
               <a:t>مُشْمِسًا وَحَارًّا. كَيْفَ الجَوُّ فِي بَلَدِكَ الآنَ؟</a:t>
@@ -43742,6 +44016,7 @@
                   <a:srgbClr val="D4AF37"/>
                 </a:solidFill>
                 <a:latin typeface="Amiri" pitchFamily="2" charset="-78"/>
+                <a:ea typeface="Amiri" pitchFamily="2" charset="-78"/>
                 <a:cs typeface="Amiri" pitchFamily="2" charset="-78"/>
               </a:rPr>
               <a:t>م</a:t>
@@ -44062,6 +44337,7 @@
                   <a:srgbClr val="8A6D1E"/>
                 </a:solidFill>
                 <a:latin typeface="Amiri" pitchFamily="2" charset="-78"/>
+                <a:ea typeface="Amiri" pitchFamily="2" charset="-78"/>
                 <a:cs typeface="Amiri" pitchFamily="2" charset="-78"/>
               </a:rPr>
               <a:t>حَجْزُ غُرْفَةٍ فِي فُنْدُقٍ</a:t>
@@ -44342,6 +44618,7 @@
                   <a:srgbClr val="1B3B6F"/>
                 </a:solidFill>
                 <a:latin typeface="Amiri" pitchFamily="2" charset="-78"/>
+                <a:ea typeface="Amiri" pitchFamily="2" charset="-78"/>
                 <a:cs typeface="Amiri" pitchFamily="2" charset="-78"/>
               </a:rPr>
               <a:t>أُرِيدُ أَنْ أَحْجِزَ …</a:t>
@@ -44418,6 +44695,7 @@
                   <a:srgbClr val="1B3B6F"/>
                 </a:solidFill>
                 <a:latin typeface="Amiri" pitchFamily="2" charset="-78"/>
+                <a:ea typeface="Amiri" pitchFamily="2" charset="-78"/>
                 <a:cs typeface="Amiri" pitchFamily="2" charset="-78"/>
               </a:rPr>
               <a:t>فُنْدُقُ البَحْرِ، صَبَاحَ الخَيْرِ.</a:t>
@@ -44586,6 +44864,7 @@
                   <a:srgbClr val="1B3B6F"/>
                 </a:solidFill>
                 <a:latin typeface="Amiri" pitchFamily="2" charset="-78"/>
+                <a:ea typeface="Amiri" pitchFamily="2" charset="-78"/>
                 <a:cs typeface="Amiri" pitchFamily="2" charset="-78"/>
               </a:rPr>
               <a:t>لِثَلَاثِ لَيَالٍ، مِنْ … إِلَى …</a:t>
@@ -44662,6 +44941,7 @@
                   <a:srgbClr val="1B3B6F"/>
                 </a:solidFill>
                 <a:latin typeface="Amiri" pitchFamily="2" charset="-78"/>
+                <a:ea typeface="Amiri" pitchFamily="2" charset="-78"/>
                 <a:cs typeface="Amiri" pitchFamily="2" charset="-78"/>
               </a:rPr>
               <a:t>لِكَمْ لَيْلَةً؟</a:t>
@@ -44830,6 +45110,7 @@
                   <a:srgbClr val="1B3B6F"/>
                 </a:solidFill>
                 <a:latin typeface="Amiri" pitchFamily="2" charset="-78"/>
+                <a:ea typeface="Amiri" pitchFamily="2" charset="-78"/>
                 <a:cs typeface="Amiri" pitchFamily="2" charset="-78"/>
               </a:rPr>
               <a:t>سَآخُذُ … لِأَنَّهَا أَرْخَصُ / أَجْمَلُ …</a:t>
@@ -44909,6 +45190,7 @@
                   <a:srgbClr val="1B3B6F"/>
                 </a:solidFill>
                 <a:latin typeface="Amiri" pitchFamily="2" charset="-78"/>
+                <a:ea typeface="Amiri" pitchFamily="2" charset="-78"/>
                 <a:cs typeface="Amiri" pitchFamily="2" charset="-78"/>
               </a:rPr>
               <a:t>عِنْدَنَا غُرْفَةٌ تُطِلُّ عَلَى البَحْرِ بِمِئَةِ دِينَارٍ، وَغُرْفَةٌ أُخْرَى بِسَبْعِينَ.</a:t>
@@ -45012,6 +45294,7 @@
                   <a:srgbClr val="1B3B6F"/>
                 </a:solidFill>
                 <a:latin typeface="Amiri" pitchFamily="2" charset="-78"/>
+                <a:ea typeface="Amiri" pitchFamily="2" charset="-78"/>
                 <a:cs typeface="Amiri" pitchFamily="2" charset="-78"/>
               </a:rPr>
               <a:t>هَلْ يُوجَدُ …؟ وَهَلْ …؟</a:t>
@@ -45088,6 +45371,7 @@
                   <a:srgbClr val="1B3B6F"/>
                 </a:solidFill>
                 <a:latin typeface="Amiri" pitchFamily="2" charset="-78"/>
+                <a:ea typeface="Amiri" pitchFamily="2" charset="-78"/>
                 <a:cs typeface="Amiri" pitchFamily="2" charset="-78"/>
               </a:rPr>
               <a:t>حَسَنًا.</a:t>
@@ -45191,6 +45475,7 @@
                   <a:srgbClr val="1B3B6F"/>
                 </a:solidFill>
                 <a:latin typeface="Amiri" pitchFamily="2" charset="-78"/>
+                <a:ea typeface="Amiri" pitchFamily="2" charset="-78"/>
                 <a:cs typeface="Amiri" pitchFamily="2" charset="-78"/>
               </a:rPr>
               <a:t>سَنَصِلُ بِالطَّائِرَةِ / بِالسَّيَّارَةِ …</a:t>
@@ -45267,6 +45552,7 @@
                   <a:srgbClr val="1B3B6F"/>
                 </a:solidFill>
                 <a:latin typeface="Amiri" pitchFamily="2" charset="-78"/>
+                <a:ea typeface="Amiri" pitchFamily="2" charset="-78"/>
                 <a:cs typeface="Amiri" pitchFamily="2" charset="-78"/>
               </a:rPr>
               <a:t>نَعَمْ لِلِاثْنَيْنِ. كَيْفَ سَتَصِلُونَ إِلَى الفُنْدُقِ؟</a:t>
@@ -45441,13 +45727,9 @@
     <a:fontScheme name="Office">
       <a:majorFont>
         <a:latin typeface="Calibri Light" panose="020F0302020204030204"/>
-        <a:ea typeface=""/>
-        <a:cs typeface=""/>
-        <a:font script="Jpan" typeface="游ゴシック Light"/>
-        <a:font script="Hang" typeface="맑은 고딕"/>
-        <a:font script="Hans" typeface="等线 Light"/>
-        <a:font script="Hant" typeface="新細明體"/>
-        <a:font script="Arab" typeface="Times New Roman"/>
+        <a:ea typeface="Amiri" pitchFamily="2" charset="-78"/>
+        <a:cs typeface="Amiri" pitchFamily="2" charset="-78"/>
+        <a:font script="Arab" typeface="Amiri"/>
         <a:font script="Hebr" typeface="Times New Roman"/>
         <a:font script="Thai" typeface="Angsana New"/>
         <a:font script="Ethi" typeface="Nyala"/>
@@ -45493,13 +45775,9 @@
       </a:majorFont>
       <a:minorFont>
         <a:latin typeface="Calibri" panose="020F0502020204030204"/>
-        <a:ea typeface=""/>
-        <a:cs typeface=""/>
-        <a:font script="Jpan" typeface="游ゴシック"/>
-        <a:font script="Hang" typeface="맑은 고딕"/>
-        <a:font script="Hans" typeface="等线"/>
-        <a:font script="Hant" typeface="新細明體"/>
-        <a:font script="Arab" typeface="Arial"/>
+        <a:ea typeface="Amiri" pitchFamily="2" charset="-78"/>
+        <a:cs typeface="Amiri" pitchFamily="2" charset="-78"/>
+        <a:font script="Arab" typeface="Amiri"/>
         <a:font script="Hebr" typeface="Arial"/>
         <a:font script="Thai" typeface="Cordia New"/>
         <a:font script="Ethi" typeface="Nyala"/>
